--- a/Schools_ML_Track/camp_2026/slides/DA/DA11.pptx
+++ b/Schools_ML_Track/camp_2026/slides/DA/DA11.pptx
@@ -130,7 +130,7 @@
   <p:extLst>
     <p:ext uri="{521415D9-36F7-43E2-AB2F-B90AF26B5E84}">
       <p14:sectionLst xmlns:p14="http://schemas.microsoft.com/office/powerpoint/2010/main">
-        <p14:section name="Opening" id="{15f0497e-fb78-578c-7e65-0e6b83cb4e70}">
+        <p14:section name="Opening" id="{d7ba9d37-ee7a-7136-5c45-ba483cc119d7}">
           <p14:sldIdLst>
             <p14:sldId id="256"/>
             <p14:sldId id="257"/>
@@ -141,7 +141,7 @@
             <p14:sldId id="262"/>
           </p14:sldIdLst>
         </p14:section>
-        <p14:section name="Block A" id="{493a2900-7430-f5b2-192d-f83fa3bfbd22}">
+        <p14:section name="Block A" id="{2ce6fce8-a738-cacf-d5e0-dd930c0d6401}">
           <p14:sldIdLst>
             <p14:sldId id="263"/>
             <p14:sldId id="264"/>
@@ -152,15 +152,15 @@
             <p14:sldId id="270"/>
           </p14:sldIdLst>
         </p14:section>
-        <p14:section name="Break" id="{0742471d-5819-1559-e26d-e6a9dc06d146}">
+        <p14:section name="Break" id="{2c90342b-f81e-0a9a-fde6-acc3ac761e9c}">
           <p14:sldIdLst>
             <p14:sldId id="268"/>
           </p14:sldIdLst>
         </p14:section>
-        <p14:section name="Block A" id="{f3f5c592-c9eb-f2ea-3c58-28f5973cbd3c}">
+        <p14:section name="Block A" id="{978c81d0-c9c8-e1b5-40bf-434d7515bb70}">
           <p14:sldIdLst/>
         </p14:section>
-        <p14:section name="Block B" id="{d778084b-952e-0edf-2a84-9de3af7aa390}">
+        <p14:section name="Block B" id="{d1ee7480-2778-cf62-2d60-1bfa8e0f0d45}">
           <p14:sldIdLst>
             <p14:sldId id="271"/>
             <p14:sldId id="272"/>
@@ -170,7 +170,7 @@
             <p14:sldId id="276"/>
           </p14:sldIdLst>
         </p14:section>
-        <p14:section name="Make and close" id="{113aaca4-3cd6-e63d-6003-1b2168ab3e33}">
+        <p14:section name="Make and close" id="{7e06f54e-99ec-c204-cc70-30afddbfc3e7}">
           <p14:sldIdLst>
             <p14:sldId id="277"/>
             <p14:sldId id="278"/>

--- a/Schools_ML_Track/camp_2026/slides/DA/DA11.pptx
+++ b/Schools_ML_Track/camp_2026/slides/DA/DA11.pptx
@@ -28,10 +28,9 @@
     <p:sldId id="276" r:id="rId22"/>
     <p:sldId id="277" r:id="rId23"/>
     <p:sldId id="278" r:id="rId24"/>
-    <p:sldId id="279" r:id="rId25"/>
   </p:sldIdLst>
   <p:notesMasterIdLst>
-    <p:notesMasterId r:id="rId26"/>
+    <p:notesMasterId r:id="rId25"/>
   </p:notesMasterIdLst>
   <p:sldSz cx="12192000" cy="6858000"/>
   <p:notesSz cx="6858000" cy="12192000"/>
@@ -130,7 +129,7 @@
   <p:extLst>
     <p:ext uri="{521415D9-36F7-43E2-AB2F-B90AF26B5E84}">
       <p14:sectionLst xmlns:p14="http://schemas.microsoft.com/office/powerpoint/2010/main">
-        <p14:section name="Opening" id="{d7ba9d37-ee7a-7136-5c45-ba483cc119d7}">
+        <p14:section name="Opening" id="{494ebb35-4863-55d4-7876-bc18081af03d}">
           <p14:sldIdLst>
             <p14:sldId id="256"/>
             <p14:sldId id="257"/>
@@ -141,7 +140,7 @@
             <p14:sldId id="262"/>
           </p14:sldIdLst>
         </p14:section>
-        <p14:section name="Block A" id="{2ce6fce8-a738-cacf-d5e0-dd930c0d6401}">
+        <p14:section name="Block A" id="{4fbe47ea-1cf8-7a68-7109-6e47e5370ad5}">
           <p14:sldIdLst>
             <p14:sldId id="263"/>
             <p14:sldId id="264"/>
@@ -152,29 +151,28 @@
             <p14:sldId id="270"/>
           </p14:sldIdLst>
         </p14:section>
-        <p14:section name="Break" id="{2c90342b-f81e-0a9a-fde6-acc3ac761e9c}">
+        <p14:section name="Break" id="{a6ba5a97-b6c4-3568-9782-4ba2088d3624}">
           <p14:sldIdLst>
             <p14:sldId id="268"/>
           </p14:sldIdLst>
         </p14:section>
-        <p14:section name="Block A" id="{978c81d0-c9c8-e1b5-40bf-434d7515bb70}">
+        <p14:section name="Block A" id="{777353ac-8992-c919-8f28-04ab1c50623b}">
           <p14:sldIdLst/>
         </p14:section>
-        <p14:section name="Block B" id="{d1ee7480-2778-cf62-2d60-1bfa8e0f0d45}">
+        <p14:section name="Block B" id="{9c1ab8df-e0bd-232d-f610-f53b7df863c4}">
           <p14:sldIdLst>
             <p14:sldId id="271"/>
             <p14:sldId id="272"/>
             <p14:sldId id="273"/>
             <p14:sldId id="274"/>
             <p14:sldId id="275"/>
-            <p14:sldId id="276"/>
           </p14:sldIdLst>
         </p14:section>
-        <p14:section name="Make and close" id="{7e06f54e-99ec-c204-cc70-30afddbfc3e7}">
+        <p14:section name="Make and close" id="{a49851bc-8a05-d343-a5c8-ca5d5e0f9655}">
           <p14:sldIdLst>
+            <p14:sldId id="276"/>
             <p14:sldId id="277"/>
             <p14:sldId id="278"/>
-            <p14:sldId id="279"/>
           </p14:sldIdLst>
         </p14:section>
       </p14:sectionLst>
@@ -1209,7 +1207,8 @@
           <a:p>
             <a:r>
               <a:rPr lang="en-US" dirty="0"/>
-              <a:t>Read this first part of the code with me before we run anything. ['A histogram shows how the values are spread.', 'A scatter plot puts two numbers on the two axes.', 'These two charts use the Sunrise Shops tables.']</a:t>
+              <a:t>A histogram shows how the values are spread. A scatter plot puts two numbers on the two axes.
+Make a prediction. Predict the shape of the histogram of sale values: balanced, or bunched at the low end with a long tail? Write it on paper. It does not have to be right.</a:t>
             </a:r>
             <a:endParaRPr lang="en-US" dirty="0"/>
           </a:p>
@@ -1297,8 +1296,9 @@
           <a:p>
             <a:r>
               <a:rPr lang="en-US" dirty="0"/>
-              <a:t>A histogram shows how the values are spread. A scatter plot puts two numbers on the two axes.
-Make a prediction. Predict the shape of the histogram of sale values: balanced, or bunched at the low end with a long tail? Write it on paper. It does not have to be right.</a:t>
+              <a:t>Running it now. Match each line of the output with the line of code that made it.
+The histogram is bunched at the low end with a long tail to the right, because most sales are small and a few are very large. The scatter plot has 180 dots, one for each shop and day. More customers usually mean more revenue, but the dots are scattered, so the link is not exact.
+Keep your guess. We use it in the next step.</a:t>
             </a:r>
             <a:endParaRPr lang="en-US" dirty="0"/>
           </a:p>
@@ -1386,9 +1386,11 @@
           <a:p>
             <a:r>
               <a:rPr lang="en-US" dirty="0"/>
-              <a:t>Running it now. Match each line of the output with the line of code that made it.
-The histogram is bunched at the low end with a long tail to the right, because most sales are small and a few are very large. The scatter plot has 180 dots, one for each shop and day. More customers usually mean more revenue, but the dots are scattered, so the link is not exact.
-Keep your guess. We use it in the next step.</a:t>
+              <a:t>Now we look closely at histogram and scatter plot. I have two questions for you.
+Question one. What does the long tail in the histogram tell us? Give it thirty seconds and then we will hear a few answers.
+Let me answer it. A few sales are far larger than the rest. That is why the mean is above the median.
+Question two. Does the scatter plot show that customers cause revenue? Talk it over with your neighbour for a minute.
+The answer is this. It shows that they go together. It does not prove cause. That needs more evidence.</a:t>
             </a:r>
             <a:endParaRPr lang="en-US" dirty="0"/>
           </a:p>
@@ -1476,11 +1478,8 @@
           <a:p>
             <a:r>
               <a:rPr lang="en-US" dirty="0"/>
-              <a:t>Now we look closely at histogram and scatter plot. I have two questions for you.
-Question one. What does the long tail in the histogram tell us? Give it thirty seconds and then we will hear a few answers.
-Let me answer it. A few sales are far larger than the rest. That is why the mean is above the median.
-Question two. Does the scatter plot show that customers cause revenue? Talk it over with your neighbour for a minute.
-The answer is this. It shows that they go together. It does not prove cause. That needs more evidence.</a:t>
+              <a:t>Make one small change. Change bins=30 to bins=10 and describe what the histogram loses. Run it, then tell someone what you saw.
+What you should find: It hides detail in the long tail.</a:t>
             </a:r>
             <a:endParaRPr lang="en-US" dirty="0"/>
           </a:p>
@@ -1656,8 +1655,8 @@
           <a:p>
             <a:r>
               <a:rPr lang="en-US" dirty="0"/>
-              <a:t>Make one small change. Change bins=30 to bins=10 and describe what the histogram loses. Run it, then tell someone what you saw.
-What you should find: It hides detail in the long tail.</a:t>
+              <a:t>A line chart is the right choice when the horizontal axis is time. The line joins each day to the next, so the eye follows the rise and the fall. If the dates are crowded and overlap, rotate them or show fewer of them. That fixes the second item in your errors list.
+Use a line only when the order matters. Joining three shops with a line would suggest they follow each other, and they do not.</a:t>
             </a:r>
             <a:endParaRPr lang="en-US" dirty="0"/>
           </a:p>
@@ -1745,8 +1744,8 @@
           <a:p>
             <a:r>
               <a:rPr lang="en-US" dirty="0"/>
-              <a:t>A line chart is the right choice when the horizontal axis is time. The line joins each day to the next, so the eye follows the rise and the fall. If the dates are crowded and overlap, rotate them or show fewer of them. That fixes the second item in your errors list.
-Use a line only when the order matters. Joining three shops with a line would suggest they follow each other, and they do not.</a:t>
+              <a:t>This is your own task for today. Take it one step at a time. If you get stuck for a few minutes, read your error message, check the error card, and then ask me.
+Save it as DA11. I will come round to each of you and ask what you changed and how you checked it.</a:t>
             </a:r>
             <a:endParaRPr lang="en-US" dirty="0"/>
           </a:p>
@@ -1834,8 +1833,10 @@
           <a:p>
             <a:r>
               <a:rPr lang="en-US" dirty="0"/>
-              <a:t>This is your own task for today. Take it one step at a time. If you get stuck for a few minutes, read your error message, check the error card, and then ask me.
-Save it as DA11. I will come round to each of you and ask what you changed and how you checked it.</a:t>
+              <a:t>Everyone meets errors, including me. Two are likely today, so let us meet them now.
+This is the first one. You will see: The chart appears empty. It means this: plt.show() ran before the data was added, or the data was empty. To fix it, Run the cell that creates the table first and print its length.
+The next one. You will see: The labels on the dates overlap. It means this: there are too many labels to fit side by side. To fix it, rotate them with plt.xticks(rotation=90) or plot fewer dates.
+Keep this slide in mind when something stops working.</a:t>
             </a:r>
             <a:endParaRPr lang="en-US" dirty="0"/>
           </a:p>
@@ -1923,10 +1924,9 @@
           <a:p>
             <a:r>
               <a:rPr lang="en-US" dirty="0"/>
-              <a:t>Everyone meets errors, including me. Two are likely today, so let us meet them now.
-This is the first one. You will see: The chart appears empty. It means this: plt.show() ran before the data was added, or the data was empty. To fix it, Run the cell that creates the table first and print its length.
-The next one. You will see: The labels on the dates overlap. It means this: there are too many labels to fit side by side. To fix it, rotate them with plt.xticks(rotation=90) or plot fewer dates.
-Keep this slide in mind when something stops working.</a:t>
+              <a:t>We are nearly done. Remember the question from the start of the session: Which chart shows this comparison most clearly?
+Write this sentence in your notebook and finish it your own way. I choose the chart by the question, label its axes, and say what it cannot show.
+Then save your notebook, close it and open it again to check it saved.</a:t>
             </a:r>
             <a:endParaRPr lang="en-US" dirty="0"/>
           </a:p>
@@ -1950,96 +1950,6 @@
             <a:fld id="{F7021451-1387-4CA6-816F-3879F97B5CBC}" type="slidenum">
               <a:rPr lang="en-US"/>
               <a:t>23</a:t>
-            </a:fld>
-            <a:endParaRPr lang="en-US"/>
-          </a:p>
-        </p:txBody>
-      </p:sp>
-    </p:spTree>
-    <p:extLst>
-      <p:ext uri="{BB962C8B-B14F-4D97-AF65-F5344CB8AC3E}">
-        <p14:creationId xmlns:p14="http://schemas.microsoft.com/office/powerpoint/2010/main" val="1024086991"/>
-      </p:ext>
-    </p:extLst>
-  </p:cSld>
-  <p:clrMapOvr>
-    <a:masterClrMapping/>
-  </p:clrMapOvr>
-</p:notes>
-</file>
-
-<file path=ppt/notesSlides/notesSlide24.xml><?xml version="1.0" encoding="utf-8"?>
-<p:notes xmlns:a="http://schemas.openxmlformats.org/drawingml/2006/main" xmlns:r="http://schemas.openxmlformats.org/officeDocument/2006/relationships" xmlns:p="http://schemas.openxmlformats.org/presentationml/2006/main">
-  <p:cSld>
-    <p:spTree>
-      <p:nvGrpSpPr>
-        <p:cNvPr id="1" name=""/>
-        <p:cNvGrpSpPr/>
-        <p:nvPr/>
-      </p:nvGrpSpPr>
-      <p:grpSpPr>
-        <a:xfrm>
-          <a:off x="0" y="0"/>
-          <a:ext cx="0" cy="0"/>
-          <a:chOff x="0" y="0"/>
-          <a:chExt cx="0" cy="0"/>
-        </a:xfrm>
-      </p:grpSpPr>
-      <p:sp>
-        <p:nvSpPr>
-          <p:cNvPr id="2" name="Slide Image Placeholder 1"/>
-          <p:cNvSpPr>
-            <a:spLocks noGrp="1" noRot="1" noChangeAspect="1"/>
-          </p:cNvSpPr>
-          <p:nvPr>
-            <p:ph type="sldImg"/>
-          </p:nvPr>
-        </p:nvSpPr>
-        <p:spPr/>
-      </p:sp>
-      <p:sp>
-        <p:nvSpPr>
-          <p:cNvPr id="3" name="Notes Placeholder 2"/>
-          <p:cNvSpPr>
-            <a:spLocks noGrp="1"/>
-          </p:cNvSpPr>
-          <p:nvPr>
-            <p:ph type="body" idx="1"/>
-          </p:nvPr>
-        </p:nvSpPr>
-        <p:spPr/>
-        <p:txBody>
-          <a:bodyPr/>
-          <a:lstStyle/>
-          <a:p>
-            <a:r>
-              <a:rPr lang="en-US" dirty="0"/>
-              <a:t>We are nearly done. Remember the question from the start of the session: Which chart shows this comparison most clearly?
-Write this sentence in your notebook and finish it your own way. I choose the chart by the question, label its axes, and say what it cannot show.
-Then save your notebook, close it and open it again to check it saved.</a:t>
-            </a:r>
-            <a:endParaRPr lang="en-US" dirty="0"/>
-          </a:p>
-        </p:txBody>
-      </p:sp>
-      <p:sp>
-        <p:nvSpPr>
-          <p:cNvPr id="4" name="Slide Number Placeholder 3"/>
-          <p:cNvSpPr>
-            <a:spLocks noGrp="1"/>
-          </p:cNvSpPr>
-          <p:nvPr>
-            <p:ph type="sldNum" sz="quarter" idx="10"/>
-          </p:nvPr>
-        </p:nvSpPr>
-        <p:spPr/>
-        <p:txBody>
-          <a:bodyPr/>
-          <a:lstStyle/>
-          <a:p>
-            <a:fld id="{F7021451-1387-4CA6-816F-3879F97B5CBC}" type="slidenum">
-              <a:rPr lang="en-US"/>
-              <a:t>24</a:t>
             </a:fld>
             <a:endParaRPr lang="en-US"/>
           </a:p>
@@ -2554,7 +2464,8 @@
           <a:p>
             <a:r>
               <a:rPr lang="en-US" dirty="0"/>
-              <a:t>Read this first part of the code with me before we run anything. ['plt.bar draws one bar for each category.', 'A bar chart starts its value axis at zero, because the length of a bar stands for the amount.', 'plt.plot joins points in order, which suits dates.']</a:t>
+              <a:t>plt.bar draws one bar for each category. A bar chart starts its value axis at zero, because the length of a bar stands for the amount.
+This is the part where you decide. Predict which of the three bars will be tallest. Guess on paper first. Surprises are useful.</a:t>
             </a:r>
             <a:endParaRPr lang="en-US" dirty="0"/>
           </a:p>
@@ -2642,8 +2553,7 @@
           <a:p>
             <a:r>
               <a:rPr lang="en-US" dirty="0"/>
-              <a:t>plt.bar draws one bar for each category. A bar chart starts its value axis at zero, because the length of a bar stands for the amount.
-This is the part where you decide. Predict which of the three bars will be tallest. Guess on paper first. Surprises are useful.</a:t>
+              <a:t>Here is the rest of the code. Read it through once. Then write your guess on paper before we run anything.</a:t>
             </a:r>
             <a:endParaRPr lang="en-US" dirty="0"/>
           </a:p>
@@ -3377,7 +3287,24 @@
                 <a:ea typeface="Lato" pitchFamily="34" charset="-122"/>
                 <a:cs typeface="Lato" pitchFamily="34" charset="-120"/>
               </a:rPr>
-              <a:t>Charts that say what the numbers say</a:t>
+              <a:t>Charts that say what</a:t>
+            </a:r>
+            <a:endParaRPr lang="en-US" sz="5600" dirty="0"/>
+          </a:p>
+          <a:p>
+            <a:pPr algn="l" indent="0" marL="0">
+              <a:buNone/>
+            </a:pPr>
+            <a:r>
+              <a:rPr lang="en-US" sz="5600" b="1" dirty="0">
+                <a:solidFill>
+                  <a:srgbClr val="FFFFFF"/>
+                </a:solidFill>
+                <a:latin typeface="Lato" pitchFamily="34" charset="0"/>
+                <a:ea typeface="Lato" pitchFamily="34" charset="-122"/>
+                <a:cs typeface="Lato" pitchFamily="34" charset="-120"/>
+              </a:rPr>
+              <a:t>the numbers say</a:t>
             </a:r>
             <a:endParaRPr lang="en-US" sz="5600" dirty="0"/>
           </a:p>
@@ -4815,7 +4742,7 @@
                 <a:ea typeface="Lato" pitchFamily="34" charset="-122"/>
                 <a:cs typeface="Lato" pitchFamily="34" charset="-120"/>
               </a:rPr>
-              <a:t>Predict: Histogram and scatter plot (1 of 2)</a:t>
+              <a:t>Predict: Histogram and scatter plot</a:t>
             </a:r>
             <a:endParaRPr lang="en-US" sz="3800" dirty="0"/>
           </a:p>
@@ -4830,11 +4757,11 @@
         <p:spPr>
           <a:xfrm>
             <a:off x="640080" y="1645920"/>
-            <a:ext cx="10881360" cy="2221992"/>
+            <a:ext cx="10881360" cy="3344672"/>
           </a:xfrm>
           <a:prstGeom prst="roundRect">
             <a:avLst>
-              <a:gd name="adj" fmla="val 3292"/>
+              <a:gd name="adj" fmla="val 2187"/>
             </a:avLst>
           </a:prstGeom>
           <a:solidFill>
@@ -4852,7 +4779,7 @@
         <p:spPr>
           <a:xfrm>
             <a:off x="841248" y="1847088"/>
-            <a:ext cx="10479024" cy="1819656"/>
+            <a:ext cx="10479024" cy="2942336"/>
           </a:xfrm>
           <a:prstGeom prst="rect">
             <a:avLst/>
@@ -4866,12 +4793,12 @@
           <a:p>
             <a:pPr algn="l" indent="0" marL="0">
               <a:lnSpc>
-                <a:spcPts val="2340"/>
-              </a:lnSpc>
-              <a:buNone/>
-            </a:pPr>
-            <a:r>
-              <a:rPr lang="en-US" sz="1800" dirty="0">
+                <a:spcPts val="2080"/>
+              </a:lnSpc>
+              <a:buNone/>
+            </a:pPr>
+            <a:r>
+              <a:rPr lang="en-US" sz="1600" dirty="0">
                 <a:solidFill>
                   <a:srgbClr val="FFFFFF"/>
                 </a:solidFill>
@@ -4883,12 +4810,12 @@
             </a:r>
             <a:pPr algn="l" indent="0" marL="0">
               <a:lnSpc>
-                <a:spcPts val="2340"/>
-              </a:lnSpc>
-              <a:buNone/>
-            </a:pPr>
-            <a:r>
-              <a:rPr lang="en-US" sz="1800" dirty="0">
+                <a:spcPts val="2080"/>
+              </a:lnSpc>
+              <a:buNone/>
+            </a:pPr>
+            <a:r>
+              <a:rPr lang="en-US" sz="1600" dirty="0">
                 <a:solidFill>
                   <a:srgbClr val="E0BE36"/>
                 </a:solidFill>
@@ -4900,12 +4827,12 @@
             </a:r>
             <a:pPr algn="l" indent="0" marL="0">
               <a:lnSpc>
-                <a:spcPts val="2340"/>
-              </a:lnSpc>
-              <a:buNone/>
-            </a:pPr>
-            <a:r>
-              <a:rPr lang="en-US" sz="1800" dirty="0">
+                <a:spcPts val="2080"/>
+              </a:lnSpc>
+              <a:buNone/>
+            </a:pPr>
+            <a:r>
+              <a:rPr lang="en-US" sz="1600" dirty="0">
                 <a:solidFill>
                   <a:srgbClr val="FFFFFF"/>
                 </a:solidFill>
@@ -4915,17 +4842,17 @@
               </a:rPr>
               <a:t>)</a:t>
             </a:r>
-            <a:endParaRPr lang="en-US" sz="1800" dirty="0"/>
-          </a:p>
-          <a:p>
-            <a:pPr algn="l" indent="0" marL="0">
-              <a:lnSpc>
-                <a:spcPts val="2340"/>
-              </a:lnSpc>
-              <a:buNone/>
-            </a:pPr>
-            <a:r>
-              <a:rPr lang="en-US" sz="1800" dirty="0">
+            <a:endParaRPr lang="en-US" sz="1600" dirty="0"/>
+          </a:p>
+          <a:p>
+            <a:pPr algn="l" indent="0" marL="0">
+              <a:lnSpc>
+                <a:spcPts val="2080"/>
+              </a:lnSpc>
+              <a:buNone/>
+            </a:pPr>
+            <a:r>
+              <a:rPr lang="en-US" sz="1600" dirty="0">
                 <a:solidFill>
                   <a:srgbClr val="FFFFFF"/>
                 </a:solidFill>
@@ -4937,12 +4864,12 @@
             </a:r>
             <a:pPr algn="l" indent="0" marL="0">
               <a:lnSpc>
-                <a:spcPts val="2340"/>
-              </a:lnSpc>
-              <a:buNone/>
-            </a:pPr>
-            <a:r>
-              <a:rPr lang="en-US" sz="1800" dirty="0">
+                <a:spcPts val="2080"/>
+              </a:lnSpc>
+              <a:buNone/>
+            </a:pPr>
+            <a:r>
+              <a:rPr lang="en-US" sz="1600" dirty="0">
                 <a:solidFill>
                   <a:srgbClr val="E0BE36"/>
                 </a:solidFill>
@@ -4954,12 +4881,12 @@
             </a:r>
             <a:pPr algn="l" indent="0" marL="0">
               <a:lnSpc>
-                <a:spcPts val="2340"/>
-              </a:lnSpc>
-              <a:buNone/>
-            </a:pPr>
-            <a:r>
-              <a:rPr lang="en-US" sz="1800" dirty="0">
+                <a:spcPts val="2080"/>
+              </a:lnSpc>
+              <a:buNone/>
+            </a:pPr>
+            <a:r>
+              <a:rPr lang="en-US" sz="1600" dirty="0">
                 <a:solidFill>
                   <a:srgbClr val="FFFFFF"/>
                 </a:solidFill>
@@ -4971,12 +4898,12 @@
             </a:r>
             <a:pPr algn="l" indent="0" marL="0">
               <a:lnSpc>
-                <a:spcPts val="2340"/>
-              </a:lnSpc>
-              <a:buNone/>
-            </a:pPr>
-            <a:r>
-              <a:rPr lang="en-US" sz="1800" dirty="0">
+                <a:spcPts val="2080"/>
+              </a:lnSpc>
+              <a:buNone/>
+            </a:pPr>
+            <a:r>
+              <a:rPr lang="en-US" sz="1600" dirty="0">
                 <a:solidFill>
                   <a:srgbClr val="E0BE36"/>
                 </a:solidFill>
@@ -4988,12 +4915,12 @@
             </a:r>
             <a:pPr algn="l" indent="0" marL="0">
               <a:lnSpc>
-                <a:spcPts val="2340"/>
-              </a:lnSpc>
-              <a:buNone/>
-            </a:pPr>
-            <a:r>
-              <a:rPr lang="en-US" sz="1800" dirty="0">
+                <a:spcPts val="2080"/>
+              </a:lnSpc>
+              <a:buNone/>
+            </a:pPr>
+            <a:r>
+              <a:rPr lang="en-US" sz="1600" dirty="0">
                 <a:solidFill>
                   <a:srgbClr val="FFFFFF"/>
                 </a:solidFill>
@@ -5005,12 +4932,12 @@
             </a:r>
             <a:pPr algn="l" indent="0" marL="0">
               <a:lnSpc>
-                <a:spcPts val="2340"/>
-              </a:lnSpc>
-              <a:buNone/>
-            </a:pPr>
-            <a:r>
-              <a:rPr lang="en-US" sz="1800" dirty="0">
+                <a:spcPts val="2080"/>
+              </a:lnSpc>
+              <a:buNone/>
+            </a:pPr>
+            <a:r>
+              <a:rPr lang="en-US" sz="1600" dirty="0">
                 <a:solidFill>
                   <a:srgbClr val="E0BE36"/>
                 </a:solidFill>
@@ -5022,12 +4949,12 @@
             </a:r>
             <a:pPr algn="l" indent="0" marL="0">
               <a:lnSpc>
-                <a:spcPts val="2340"/>
-              </a:lnSpc>
-              <a:buNone/>
-            </a:pPr>
-            <a:r>
-              <a:rPr lang="en-US" sz="1800" dirty="0">
+                <a:spcPts val="2080"/>
+              </a:lnSpc>
+              <a:buNone/>
+            </a:pPr>
+            <a:r>
+              <a:rPr lang="en-US" sz="1600" dirty="0">
                 <a:solidFill>
                   <a:srgbClr val="FFFFFF"/>
                 </a:solidFill>
@@ -5037,17 +4964,17 @@
               </a:rPr>
               <a:t>]</a:t>
             </a:r>
-            <a:endParaRPr lang="en-US" sz="1800" dirty="0"/>
-          </a:p>
-          <a:p>
-            <a:pPr algn="l" indent="0" marL="0">
-              <a:lnSpc>
-                <a:spcPts val="2340"/>
-              </a:lnSpc>
-              <a:buNone/>
-            </a:pPr>
-            <a:r>
-              <a:rPr lang="en-US" sz="1800" dirty="0">
+            <a:endParaRPr lang="en-US" sz="1600" dirty="0"/>
+          </a:p>
+          <a:p>
+            <a:pPr algn="l" indent="0" marL="0">
+              <a:lnSpc>
+                <a:spcPts val="2080"/>
+              </a:lnSpc>
+              <a:buNone/>
+            </a:pPr>
+            <a:r>
+              <a:rPr lang="en-US" sz="1600" dirty="0">
                 <a:solidFill>
                   <a:srgbClr val="FFFFFF"/>
                 </a:solidFill>
@@ -5059,12 +4986,12 @@
             </a:r>
             <a:pPr algn="l" indent="0" marL="0">
               <a:lnSpc>
-                <a:spcPts val="2340"/>
-              </a:lnSpc>
-              <a:buNone/>
-            </a:pPr>
-            <a:r>
-              <a:rPr lang="en-US" sz="1800" dirty="0">
+                <a:spcPts val="2080"/>
+              </a:lnSpc>
+              <a:buNone/>
+            </a:pPr>
+            <a:r>
+              <a:rPr lang="en-US" sz="1600" dirty="0">
                 <a:solidFill>
                   <a:srgbClr val="E0BE36"/>
                 </a:solidFill>
@@ -5076,12 +5003,12 @@
             </a:r>
             <a:pPr algn="l" indent="0" marL="0">
               <a:lnSpc>
-                <a:spcPts val="2340"/>
-              </a:lnSpc>
-              <a:buNone/>
-            </a:pPr>
-            <a:r>
-              <a:rPr lang="en-US" sz="1800" dirty="0">
+                <a:spcPts val="2080"/>
+              </a:lnSpc>
+              <a:buNone/>
+            </a:pPr>
+            <a:r>
+              <a:rPr lang="en-US" sz="1600" dirty="0">
                 <a:solidFill>
                   <a:srgbClr val="FFFFFF"/>
                 </a:solidFill>
@@ -5091,17 +5018,17 @@
               </a:rPr>
               <a:t>], bins=30)</a:t>
             </a:r>
-            <a:endParaRPr lang="en-US" sz="1800" dirty="0"/>
-          </a:p>
-          <a:p>
-            <a:pPr algn="l" indent="0" marL="0">
-              <a:lnSpc>
-                <a:spcPts val="2340"/>
-              </a:lnSpc>
-              <a:buNone/>
-            </a:pPr>
-            <a:r>
-              <a:rPr lang="en-US" sz="1800" dirty="0">
+            <a:endParaRPr lang="en-US" sz="1600" dirty="0"/>
+          </a:p>
+          <a:p>
+            <a:pPr algn="l" indent="0" marL="0">
+              <a:lnSpc>
+                <a:spcPts val="2080"/>
+              </a:lnSpc>
+              <a:buNone/>
+            </a:pPr>
+            <a:r>
+              <a:rPr lang="en-US" sz="1600" dirty="0">
                 <a:solidFill>
                   <a:srgbClr val="FFFFFF"/>
                 </a:solidFill>
@@ -5113,12 +5040,12 @@
             </a:r>
             <a:pPr algn="l" indent="0" marL="0">
               <a:lnSpc>
-                <a:spcPts val="2340"/>
-              </a:lnSpc>
-              <a:buNone/>
-            </a:pPr>
-            <a:r>
-              <a:rPr lang="en-US" sz="1800" dirty="0">
+                <a:spcPts val="2080"/>
+              </a:lnSpc>
+              <a:buNone/>
+            </a:pPr>
+            <a:r>
+              <a:rPr lang="en-US" sz="1600" dirty="0">
                 <a:solidFill>
                   <a:srgbClr val="E0BE36"/>
                 </a:solidFill>
@@ -5130,12 +5057,12 @@
             </a:r>
             <a:pPr algn="l" indent="0" marL="0">
               <a:lnSpc>
-                <a:spcPts val="2340"/>
-              </a:lnSpc>
-              <a:buNone/>
-            </a:pPr>
-            <a:r>
-              <a:rPr lang="en-US" sz="1800" dirty="0">
+                <a:spcPts val="2080"/>
+              </a:lnSpc>
+              <a:buNone/>
+            </a:pPr>
+            <a:r>
+              <a:rPr lang="en-US" sz="1600" dirty="0">
                 <a:solidFill>
                   <a:srgbClr val="FFFFFF"/>
                 </a:solidFill>
@@ -5145,17 +5072,17 @@
               </a:rPr>
               <a:t>)</a:t>
             </a:r>
-            <a:endParaRPr lang="en-US" sz="1800" dirty="0"/>
-          </a:p>
-          <a:p>
-            <a:pPr algn="l" indent="0" marL="0">
-              <a:lnSpc>
-                <a:spcPts val="2340"/>
-              </a:lnSpc>
-              <a:buNone/>
-            </a:pPr>
-            <a:r>
-              <a:rPr lang="en-US" sz="1800" dirty="0">
+            <a:endParaRPr lang="en-US" sz="1600" dirty="0"/>
+          </a:p>
+          <a:p>
+            <a:pPr algn="l" indent="0" marL="0">
+              <a:lnSpc>
+                <a:spcPts val="2080"/>
+              </a:lnSpc>
+              <a:buNone/>
+            </a:pPr>
+            <a:r>
+              <a:rPr lang="en-US" sz="1600" dirty="0">
                 <a:solidFill>
                   <a:srgbClr val="FFFFFF"/>
                 </a:solidFill>
@@ -5167,12 +5094,12 @@
             </a:r>
             <a:pPr algn="l" indent="0" marL="0">
               <a:lnSpc>
-                <a:spcPts val="2340"/>
-              </a:lnSpc>
-              <a:buNone/>
-            </a:pPr>
-            <a:r>
-              <a:rPr lang="en-US" sz="1800" dirty="0">
+                <a:spcPts val="2080"/>
+              </a:lnSpc>
+              <a:buNone/>
+            </a:pPr>
+            <a:r>
+              <a:rPr lang="en-US" sz="1600" dirty="0">
                 <a:solidFill>
                   <a:srgbClr val="E0BE36"/>
                 </a:solidFill>
@@ -5184,12 +5111,12 @@
             </a:r>
             <a:pPr algn="l" indent="0" marL="0">
               <a:lnSpc>
-                <a:spcPts val="2340"/>
-              </a:lnSpc>
-              <a:buNone/>
-            </a:pPr>
-            <a:r>
-              <a:rPr lang="en-US" sz="1800" dirty="0">
+                <a:spcPts val="2080"/>
+              </a:lnSpc>
+              <a:buNone/>
+            </a:pPr>
+            <a:r>
+              <a:rPr lang="en-US" sz="1600" dirty="0">
                 <a:solidFill>
                   <a:srgbClr val="FFFFFF"/>
                 </a:solidFill>
@@ -5199,17 +5126,17 @@
               </a:rPr>
               <a:t>)</a:t>
             </a:r>
-            <a:endParaRPr lang="en-US" sz="1800" dirty="0"/>
-          </a:p>
-          <a:p>
-            <a:pPr algn="l" indent="0" marL="0">
-              <a:lnSpc>
-                <a:spcPts val="2340"/>
-              </a:lnSpc>
-              <a:buNone/>
-            </a:pPr>
-            <a:r>
-              <a:rPr lang="en-US" sz="1800" dirty="0">
+            <a:endParaRPr lang="en-US" sz="1600" dirty="0"/>
+          </a:p>
+          <a:p>
+            <a:pPr algn="l" indent="0" marL="0">
+              <a:lnSpc>
+                <a:spcPts val="2080"/>
+              </a:lnSpc>
+              <a:buNone/>
+            </a:pPr>
+            <a:r>
+              <a:rPr lang="en-US" sz="1600" dirty="0">
                 <a:solidFill>
                   <a:srgbClr val="FFFFFF"/>
                 </a:solidFill>
@@ -5219,7 +5146,277 @@
               </a:rPr>
               <a:t>plt.show()</a:t>
             </a:r>
-            <a:endParaRPr lang="en-US" sz="1800" dirty="0"/>
+            <a:endParaRPr lang="en-US" sz="1600" dirty="0"/>
+          </a:p>
+          <a:p>
+            <a:pPr algn="l" indent="0" marL="0">
+              <a:lnSpc>
+                <a:spcPts val="2080"/>
+              </a:lnSpc>
+              <a:buNone/>
+            </a:pPr>
+            <a:r>
+              <a:rPr lang="en-US" sz="1600" dirty="0">
+                <a:solidFill>
+                  <a:srgbClr val="FFFFFF"/>
+                </a:solidFill>
+                <a:latin typeface="Courier New" pitchFamily="34" charset="0"/>
+                <a:ea typeface="Courier New" pitchFamily="34" charset="-122"/>
+                <a:cs typeface="Courier New" pitchFamily="34" charset="-120"/>
+              </a:rPr>
+              <a:t>daily = pd.read_csv(</a:t>
+            </a:r>
+            <a:pPr algn="l" indent="0" marL="0">
+              <a:lnSpc>
+                <a:spcPts val="2080"/>
+              </a:lnSpc>
+              <a:buNone/>
+            </a:pPr>
+            <a:r>
+              <a:rPr lang="en-US" sz="1600" dirty="0">
+                <a:solidFill>
+                  <a:srgbClr val="E0BE36"/>
+                </a:solidFill>
+                <a:latin typeface="Courier New" pitchFamily="34" charset="0"/>
+                <a:ea typeface="Courier New" pitchFamily="34" charset="-122"/>
+                <a:cs typeface="Courier New" pitchFamily="34" charset="-120"/>
+              </a:rPr>
+              <a:t>"sunrise_daily_summary.csv"</a:t>
+            </a:r>
+            <a:pPr algn="l" indent="0" marL="0">
+              <a:lnSpc>
+                <a:spcPts val="2080"/>
+              </a:lnSpc>
+              <a:buNone/>
+            </a:pPr>
+            <a:r>
+              <a:rPr lang="en-US" sz="1600" dirty="0">
+                <a:solidFill>
+                  <a:srgbClr val="FFFFFF"/>
+                </a:solidFill>
+                <a:latin typeface="Courier New" pitchFamily="34" charset="0"/>
+                <a:ea typeface="Courier New" pitchFamily="34" charset="-122"/>
+                <a:cs typeface="Courier New" pitchFamily="34" charset="-120"/>
+              </a:rPr>
+              <a:t>)</a:t>
+            </a:r>
+            <a:endParaRPr lang="en-US" sz="1600" dirty="0"/>
+          </a:p>
+          <a:p>
+            <a:pPr algn="l" indent="0" marL="0">
+              <a:lnSpc>
+                <a:spcPts val="2080"/>
+              </a:lnSpc>
+              <a:buNone/>
+            </a:pPr>
+            <a:r>
+              <a:rPr lang="en-US" sz="1600" dirty="0">
+                <a:solidFill>
+                  <a:srgbClr val="FFFFFF"/>
+                </a:solidFill>
+                <a:latin typeface="Courier New" pitchFamily="34" charset="0"/>
+                <a:ea typeface="Courier New" pitchFamily="34" charset="-122"/>
+                <a:cs typeface="Courier New" pitchFamily="34" charset="-120"/>
+              </a:rPr>
+              <a:t>plt.scatter(daily[</a:t>
+            </a:r>
+            <a:pPr algn="l" indent="0" marL="0">
+              <a:lnSpc>
+                <a:spcPts val="2080"/>
+              </a:lnSpc>
+              <a:buNone/>
+            </a:pPr>
+            <a:r>
+              <a:rPr lang="en-US" sz="1600" dirty="0">
+                <a:solidFill>
+                  <a:srgbClr val="E0BE36"/>
+                </a:solidFill>
+                <a:latin typeface="Courier New" pitchFamily="34" charset="0"/>
+                <a:ea typeface="Courier New" pitchFamily="34" charset="-122"/>
+                <a:cs typeface="Courier New" pitchFamily="34" charset="-120"/>
+              </a:rPr>
+              <a:t>"customers_counted"</a:t>
+            </a:r>
+            <a:pPr algn="l" indent="0" marL="0">
+              <a:lnSpc>
+                <a:spcPts val="2080"/>
+              </a:lnSpc>
+              <a:buNone/>
+            </a:pPr>
+            <a:r>
+              <a:rPr lang="en-US" sz="1600" dirty="0">
+                <a:solidFill>
+                  <a:srgbClr val="FFFFFF"/>
+                </a:solidFill>
+                <a:latin typeface="Courier New" pitchFamily="34" charset="0"/>
+                <a:ea typeface="Courier New" pitchFamily="34" charset="-122"/>
+                <a:cs typeface="Courier New" pitchFamily="34" charset="-120"/>
+              </a:rPr>
+              <a:t>], daily[</a:t>
+            </a:r>
+            <a:pPr algn="l" indent="0" marL="0">
+              <a:lnSpc>
+                <a:spcPts val="2080"/>
+              </a:lnSpc>
+              <a:buNone/>
+            </a:pPr>
+            <a:r>
+              <a:rPr lang="en-US" sz="1600" dirty="0">
+                <a:solidFill>
+                  <a:srgbClr val="E0BE36"/>
+                </a:solidFill>
+                <a:latin typeface="Courier New" pitchFamily="34" charset="0"/>
+                <a:ea typeface="Courier New" pitchFamily="34" charset="-122"/>
+                <a:cs typeface="Courier New" pitchFamily="34" charset="-120"/>
+              </a:rPr>
+              <a:t>"revenue_ugx"</a:t>
+            </a:r>
+            <a:pPr algn="l" indent="0" marL="0">
+              <a:lnSpc>
+                <a:spcPts val="2080"/>
+              </a:lnSpc>
+              <a:buNone/>
+            </a:pPr>
+            <a:r>
+              <a:rPr lang="en-US" sz="1600" dirty="0">
+                <a:solidFill>
+                  <a:srgbClr val="FFFFFF"/>
+                </a:solidFill>
+                <a:latin typeface="Courier New" pitchFamily="34" charset="0"/>
+                <a:ea typeface="Courier New" pitchFamily="34" charset="-122"/>
+                <a:cs typeface="Courier New" pitchFamily="34" charset="-120"/>
+              </a:rPr>
+              <a:t>])</a:t>
+            </a:r>
+            <a:endParaRPr lang="en-US" sz="1600" dirty="0"/>
+          </a:p>
+          <a:p>
+            <a:pPr algn="l" indent="0" marL="0">
+              <a:lnSpc>
+                <a:spcPts val="2080"/>
+              </a:lnSpc>
+              <a:buNone/>
+            </a:pPr>
+            <a:r>
+              <a:rPr lang="en-US" sz="1600" dirty="0">
+                <a:solidFill>
+                  <a:srgbClr val="FFFFFF"/>
+                </a:solidFill>
+                <a:latin typeface="Courier New" pitchFamily="34" charset="0"/>
+                <a:ea typeface="Courier New" pitchFamily="34" charset="-122"/>
+                <a:cs typeface="Courier New" pitchFamily="34" charset="-120"/>
+              </a:rPr>
+              <a:t>plt.xlabel(</a:t>
+            </a:r>
+            <a:pPr algn="l" indent="0" marL="0">
+              <a:lnSpc>
+                <a:spcPts val="2080"/>
+              </a:lnSpc>
+              <a:buNone/>
+            </a:pPr>
+            <a:r>
+              <a:rPr lang="en-US" sz="1600" dirty="0">
+                <a:solidFill>
+                  <a:srgbClr val="E0BE36"/>
+                </a:solidFill>
+                <a:latin typeface="Courier New" pitchFamily="34" charset="0"/>
+                <a:ea typeface="Courier New" pitchFamily="34" charset="-122"/>
+                <a:cs typeface="Courier New" pitchFamily="34" charset="-120"/>
+              </a:rPr>
+              <a:t>"Customers counted in a day"</a:t>
+            </a:r>
+            <a:pPr algn="l" indent="0" marL="0">
+              <a:lnSpc>
+                <a:spcPts val="2080"/>
+              </a:lnSpc>
+              <a:buNone/>
+            </a:pPr>
+            <a:r>
+              <a:rPr lang="en-US" sz="1600" dirty="0">
+                <a:solidFill>
+                  <a:srgbClr val="FFFFFF"/>
+                </a:solidFill>
+                <a:latin typeface="Courier New" pitchFamily="34" charset="0"/>
+                <a:ea typeface="Courier New" pitchFamily="34" charset="-122"/>
+                <a:cs typeface="Courier New" pitchFamily="34" charset="-120"/>
+              </a:rPr>
+              <a:t>)</a:t>
+            </a:r>
+            <a:endParaRPr lang="en-US" sz="1600" dirty="0"/>
+          </a:p>
+          <a:p>
+            <a:pPr algn="l" indent="0" marL="0">
+              <a:lnSpc>
+                <a:spcPts val="2080"/>
+              </a:lnSpc>
+              <a:buNone/>
+            </a:pPr>
+            <a:r>
+              <a:rPr lang="en-US" sz="1600" dirty="0">
+                <a:solidFill>
+                  <a:srgbClr val="FFFFFF"/>
+                </a:solidFill>
+                <a:latin typeface="Courier New" pitchFamily="34" charset="0"/>
+                <a:ea typeface="Courier New" pitchFamily="34" charset="-122"/>
+                <a:cs typeface="Courier New" pitchFamily="34" charset="-120"/>
+              </a:rPr>
+              <a:t>plt.ylabel(</a:t>
+            </a:r>
+            <a:pPr algn="l" indent="0" marL="0">
+              <a:lnSpc>
+                <a:spcPts val="2080"/>
+              </a:lnSpc>
+              <a:buNone/>
+            </a:pPr>
+            <a:r>
+              <a:rPr lang="en-US" sz="1600" dirty="0">
+                <a:solidFill>
+                  <a:srgbClr val="E0BE36"/>
+                </a:solidFill>
+                <a:latin typeface="Courier New" pitchFamily="34" charset="0"/>
+                <a:ea typeface="Courier New" pitchFamily="34" charset="-122"/>
+                <a:cs typeface="Courier New" pitchFamily="34" charset="-120"/>
+              </a:rPr>
+              <a:t>"Revenue that day (UGX)"</a:t>
+            </a:r>
+            <a:pPr algn="l" indent="0" marL="0">
+              <a:lnSpc>
+                <a:spcPts val="2080"/>
+              </a:lnSpc>
+              <a:buNone/>
+            </a:pPr>
+            <a:r>
+              <a:rPr lang="en-US" sz="1600" dirty="0">
+                <a:solidFill>
+                  <a:srgbClr val="FFFFFF"/>
+                </a:solidFill>
+                <a:latin typeface="Courier New" pitchFamily="34" charset="0"/>
+                <a:ea typeface="Courier New" pitchFamily="34" charset="-122"/>
+                <a:cs typeface="Courier New" pitchFamily="34" charset="-120"/>
+              </a:rPr>
+              <a:t>)</a:t>
+            </a:r>
+            <a:endParaRPr lang="en-US" sz="1600" dirty="0"/>
+          </a:p>
+          <a:p>
+            <a:pPr algn="l" indent="0" marL="0">
+              <a:lnSpc>
+                <a:spcPts val="2080"/>
+              </a:lnSpc>
+              <a:buNone/>
+            </a:pPr>
+            <a:r>
+              <a:rPr lang="en-US" sz="1600" dirty="0">
+                <a:solidFill>
+                  <a:srgbClr val="FFFFFF"/>
+                </a:solidFill>
+                <a:latin typeface="Courier New" pitchFamily="34" charset="0"/>
+                <a:ea typeface="Courier New" pitchFamily="34" charset="-122"/>
+                <a:cs typeface="Courier New" pitchFamily="34" charset="-120"/>
+              </a:rPr>
+              <a:t>plt.show()</a:t>
+            </a:r>
+            <a:endParaRPr lang="en-US" sz="1600" dirty="0"/>
           </a:p>
         </p:txBody>
       </p:sp>
@@ -5231,8 +5428,8 @@
         </p:nvSpPr>
         <p:spPr>
           <a:xfrm>
-            <a:off x="640080" y="4050792"/>
-            <a:ext cx="8046720" cy="2212848"/>
+            <a:off x="640080" y="5173472"/>
+            <a:ext cx="8046720" cy="1090168"/>
           </a:xfrm>
           <a:prstGeom prst="rect">
             <a:avLst/>
@@ -5246,7 +5443,7 @@
           <a:p>
             <a:pPr algn="l" indent="0" marL="0">
               <a:lnSpc>
-                <a:spcPts val="2880"/>
+                <a:spcPts val="2400"/>
               </a:lnSpc>
               <a:spcAft>
                 <a:spcPts val="1010"/>
@@ -5254,7 +5451,7 @@
               <a:buNone/>
             </a:pPr>
             <a:r>
-              <a:rPr lang="en-US" sz="2400" dirty="0">
+              <a:rPr lang="en-US" sz="2000" dirty="0">
                 <a:solidFill>
                   <a:srgbClr val="111111"/>
                 </a:solidFill>
@@ -5262,14 +5459,14 @@
                 <a:ea typeface="Lato" pitchFamily="34" charset="-122"/>
                 <a:cs typeface="Lato" pitchFamily="34" charset="-120"/>
               </a:rPr>
-              <a:t>Read the first part of the code. 6 lines. Say what each one does.</a:t>
-            </a:r>
-            <a:endParaRPr lang="en-US" sz="2400" dirty="0"/>
-          </a:p>
-          <a:p>
-            <a:pPr algn="l" indent="0" marL="0">
-              <a:lnSpc>
-                <a:spcPts val="2880"/>
+              <a:t>Predict the shape of the histogram of sale values: balanced, or bunched at the low end with a long tail?</a:t>
+            </a:r>
+            <a:endParaRPr lang="en-US" sz="2000" dirty="0"/>
+          </a:p>
+          <a:p>
+            <a:pPr algn="l" indent="0" marL="0">
+              <a:lnSpc>
+                <a:spcPts val="2400"/>
               </a:lnSpc>
               <a:spcAft>
                 <a:spcPts val="1010"/>
@@ -5277,7 +5474,7 @@
               <a:buNone/>
             </a:pPr>
             <a:r>
-              <a:rPr lang="en-US" sz="2400" dirty="0">
+              <a:rPr lang="en-US" sz="2000" dirty="0">
                 <a:solidFill>
                   <a:srgbClr val="111111"/>
                 </a:solidFill>
@@ -5285,9 +5482,9 @@
                 <a:ea typeface="Lato" pitchFamily="34" charset="-122"/>
                 <a:cs typeface="Lato" pitchFamily="34" charset="-120"/>
               </a:rPr>
-              <a:t>The second part comes next.</a:t>
-            </a:r>
-            <a:endParaRPr lang="en-US" sz="2400" dirty="0"/>
+              <a:t>Write your guess on paper before we run it.</a:t>
+            </a:r>
+            <a:endParaRPr lang="en-US" sz="2000" dirty="0"/>
           </a:p>
         </p:txBody>
       </p:sp>
@@ -5307,8 +5504,8 @@
         </p:blipFill>
         <p:spPr>
           <a:xfrm>
-            <a:off x="10149840" y="4983480"/>
-            <a:ext cx="1371600" cy="1188720"/>
+            <a:off x="10241280" y="5175758"/>
+            <a:ext cx="1188720" cy="1046988"/>
           </a:xfrm>
           <a:prstGeom prst="rect">
             <a:avLst/>
@@ -5423,397 +5620,15 @@
                 <a:ea typeface="Lato" pitchFamily="34" charset="-122"/>
                 <a:cs typeface="Lato" pitchFamily="34" charset="-120"/>
               </a:rPr>
-              <a:t>Predict: Histogram and scatter plot (2 of 2)</a:t>
+              <a:t>Run it: Histogram and scatter plot</a:t>
             </a:r>
             <a:endParaRPr lang="en-US" sz="3800" dirty="0"/>
-          </a:p>
-        </p:txBody>
-      </p:sp>
-      <p:sp>
-        <p:nvSpPr>
-          <p:cNvPr id="3" name="Shape 1"/>
-          <p:cNvSpPr/>
-          <p:nvPr/>
-        </p:nvSpPr>
-        <p:spPr>
-          <a:xfrm>
-            <a:off x="640080" y="1645920"/>
-            <a:ext cx="10881360" cy="2172462"/>
-          </a:xfrm>
-          <a:prstGeom prst="roundRect">
-            <a:avLst>
-              <a:gd name="adj" fmla="val 3367"/>
-            </a:avLst>
-          </a:prstGeom>
-          <a:solidFill>
-            <a:srgbClr val="111111"/>
-          </a:solidFill>
-          <a:ln/>
-        </p:spPr>
-      </p:sp>
-      <p:sp>
-        <p:nvSpPr>
-          <p:cNvPr id="4" name="Text 2"/>
-          <p:cNvSpPr txBox="1"/>
-          <p:nvPr/>
-        </p:nvSpPr>
-        <p:spPr>
-          <a:xfrm>
-            <a:off x="841248" y="1847088"/>
-            <a:ext cx="10479024" cy="1770126"/>
-          </a:xfrm>
-          <a:prstGeom prst="rect">
-            <a:avLst/>
-          </a:prstGeom>
-          <a:noFill/>
-          <a:ln/>
-        </p:spPr>
-        <p:txBody>
-          <a:bodyPr wrap="square" lIns="0" tIns="0" rIns="0" bIns="0" rtlCol="0" anchor="t"/>
-          <a:lstStyle/>
-          <a:p>
-            <a:pPr algn="l" indent="0" marL="0">
-              <a:lnSpc>
-                <a:spcPts val="2730"/>
-              </a:lnSpc>
-              <a:buNone/>
-            </a:pPr>
-            <a:r>
-              <a:rPr lang="en-US" sz="2100" dirty="0">
-                <a:solidFill>
-                  <a:srgbClr val="FFFFFF"/>
-                </a:solidFill>
-                <a:latin typeface="Courier New" pitchFamily="34" charset="0"/>
-                <a:ea typeface="Courier New" pitchFamily="34" charset="-122"/>
-                <a:cs typeface="Courier New" pitchFamily="34" charset="-120"/>
-              </a:rPr>
-              <a:t>daily = pd.read_csv(</a:t>
-            </a:r>
-            <a:pPr algn="l" indent="0" marL="0">
-              <a:lnSpc>
-                <a:spcPts val="2730"/>
-              </a:lnSpc>
-              <a:buNone/>
-            </a:pPr>
-            <a:r>
-              <a:rPr lang="en-US" sz="2100" dirty="0">
-                <a:solidFill>
-                  <a:srgbClr val="E0BE36"/>
-                </a:solidFill>
-                <a:latin typeface="Courier New" pitchFamily="34" charset="0"/>
-                <a:ea typeface="Courier New" pitchFamily="34" charset="-122"/>
-                <a:cs typeface="Courier New" pitchFamily="34" charset="-120"/>
-              </a:rPr>
-              <a:t>"sunrise_daily_summary.csv"</a:t>
-            </a:r>
-            <a:pPr algn="l" indent="0" marL="0">
-              <a:lnSpc>
-                <a:spcPts val="2730"/>
-              </a:lnSpc>
-              <a:buNone/>
-            </a:pPr>
-            <a:r>
-              <a:rPr lang="en-US" sz="2100" dirty="0">
-                <a:solidFill>
-                  <a:srgbClr val="FFFFFF"/>
-                </a:solidFill>
-                <a:latin typeface="Courier New" pitchFamily="34" charset="0"/>
-                <a:ea typeface="Courier New" pitchFamily="34" charset="-122"/>
-                <a:cs typeface="Courier New" pitchFamily="34" charset="-120"/>
-              </a:rPr>
-              <a:t>)</a:t>
-            </a:r>
-            <a:endParaRPr lang="en-US" sz="2100" dirty="0"/>
-          </a:p>
-          <a:p>
-            <a:pPr algn="l" indent="0" marL="0">
-              <a:lnSpc>
-                <a:spcPts val="2730"/>
-              </a:lnSpc>
-              <a:buNone/>
-            </a:pPr>
-            <a:r>
-              <a:rPr lang="en-US" sz="2100" dirty="0">
-                <a:solidFill>
-                  <a:srgbClr val="FFFFFF"/>
-                </a:solidFill>
-                <a:latin typeface="Courier New" pitchFamily="34" charset="0"/>
-                <a:ea typeface="Courier New" pitchFamily="34" charset="-122"/>
-                <a:cs typeface="Courier New" pitchFamily="34" charset="-120"/>
-              </a:rPr>
-              <a:t>plt.scatter(daily[</a:t>
-            </a:r>
-            <a:pPr algn="l" indent="0" marL="0">
-              <a:lnSpc>
-                <a:spcPts val="2730"/>
-              </a:lnSpc>
-              <a:buNone/>
-            </a:pPr>
-            <a:r>
-              <a:rPr lang="en-US" sz="2100" dirty="0">
-                <a:solidFill>
-                  <a:srgbClr val="E0BE36"/>
-                </a:solidFill>
-                <a:latin typeface="Courier New" pitchFamily="34" charset="0"/>
-                <a:ea typeface="Courier New" pitchFamily="34" charset="-122"/>
-                <a:cs typeface="Courier New" pitchFamily="34" charset="-120"/>
-              </a:rPr>
-              <a:t>"customers_counted"</a:t>
-            </a:r>
-            <a:pPr algn="l" indent="0" marL="0">
-              <a:lnSpc>
-                <a:spcPts val="2730"/>
-              </a:lnSpc>
-              <a:buNone/>
-            </a:pPr>
-            <a:r>
-              <a:rPr lang="en-US" sz="2100" dirty="0">
-                <a:solidFill>
-                  <a:srgbClr val="FFFFFF"/>
-                </a:solidFill>
-                <a:latin typeface="Courier New" pitchFamily="34" charset="0"/>
-                <a:ea typeface="Courier New" pitchFamily="34" charset="-122"/>
-                <a:cs typeface="Courier New" pitchFamily="34" charset="-120"/>
-              </a:rPr>
-              <a:t>], daily[</a:t>
-            </a:r>
-            <a:pPr algn="l" indent="0" marL="0">
-              <a:lnSpc>
-                <a:spcPts val="2730"/>
-              </a:lnSpc>
-              <a:buNone/>
-            </a:pPr>
-            <a:r>
-              <a:rPr lang="en-US" sz="2100" dirty="0">
-                <a:solidFill>
-                  <a:srgbClr val="E0BE36"/>
-                </a:solidFill>
-                <a:latin typeface="Courier New" pitchFamily="34" charset="0"/>
-                <a:ea typeface="Courier New" pitchFamily="34" charset="-122"/>
-                <a:cs typeface="Courier New" pitchFamily="34" charset="-120"/>
-              </a:rPr>
-              <a:t>"revenue_ugx"</a:t>
-            </a:r>
-            <a:pPr algn="l" indent="0" marL="0">
-              <a:lnSpc>
-                <a:spcPts val="2730"/>
-              </a:lnSpc>
-              <a:buNone/>
-            </a:pPr>
-            <a:r>
-              <a:rPr lang="en-US" sz="2100" dirty="0">
-                <a:solidFill>
-                  <a:srgbClr val="FFFFFF"/>
-                </a:solidFill>
-                <a:latin typeface="Courier New" pitchFamily="34" charset="0"/>
-                <a:ea typeface="Courier New" pitchFamily="34" charset="-122"/>
-                <a:cs typeface="Courier New" pitchFamily="34" charset="-120"/>
-              </a:rPr>
-              <a:t>])</a:t>
-            </a:r>
-            <a:endParaRPr lang="en-US" sz="2100" dirty="0"/>
-          </a:p>
-          <a:p>
-            <a:pPr algn="l" indent="0" marL="0">
-              <a:lnSpc>
-                <a:spcPts val="2730"/>
-              </a:lnSpc>
-              <a:buNone/>
-            </a:pPr>
-            <a:r>
-              <a:rPr lang="en-US" sz="2100" dirty="0">
-                <a:solidFill>
-                  <a:srgbClr val="FFFFFF"/>
-                </a:solidFill>
-                <a:latin typeface="Courier New" pitchFamily="34" charset="0"/>
-                <a:ea typeface="Courier New" pitchFamily="34" charset="-122"/>
-                <a:cs typeface="Courier New" pitchFamily="34" charset="-120"/>
-              </a:rPr>
-              <a:t>plt.xlabel(</a:t>
-            </a:r>
-            <a:pPr algn="l" indent="0" marL="0">
-              <a:lnSpc>
-                <a:spcPts val="2730"/>
-              </a:lnSpc>
-              <a:buNone/>
-            </a:pPr>
-            <a:r>
-              <a:rPr lang="en-US" sz="2100" dirty="0">
-                <a:solidFill>
-                  <a:srgbClr val="E0BE36"/>
-                </a:solidFill>
-                <a:latin typeface="Courier New" pitchFamily="34" charset="0"/>
-                <a:ea typeface="Courier New" pitchFamily="34" charset="-122"/>
-                <a:cs typeface="Courier New" pitchFamily="34" charset="-120"/>
-              </a:rPr>
-              <a:t>"Customers counted in a day"</a:t>
-            </a:r>
-            <a:pPr algn="l" indent="0" marL="0">
-              <a:lnSpc>
-                <a:spcPts val="2730"/>
-              </a:lnSpc>
-              <a:buNone/>
-            </a:pPr>
-            <a:r>
-              <a:rPr lang="en-US" sz="2100" dirty="0">
-                <a:solidFill>
-                  <a:srgbClr val="FFFFFF"/>
-                </a:solidFill>
-                <a:latin typeface="Courier New" pitchFamily="34" charset="0"/>
-                <a:ea typeface="Courier New" pitchFamily="34" charset="-122"/>
-                <a:cs typeface="Courier New" pitchFamily="34" charset="-120"/>
-              </a:rPr>
-              <a:t>)</a:t>
-            </a:r>
-            <a:endParaRPr lang="en-US" sz="2100" dirty="0"/>
-          </a:p>
-          <a:p>
-            <a:pPr algn="l" indent="0" marL="0">
-              <a:lnSpc>
-                <a:spcPts val="2730"/>
-              </a:lnSpc>
-              <a:buNone/>
-            </a:pPr>
-            <a:r>
-              <a:rPr lang="en-US" sz="2100" dirty="0">
-                <a:solidFill>
-                  <a:srgbClr val="FFFFFF"/>
-                </a:solidFill>
-                <a:latin typeface="Courier New" pitchFamily="34" charset="0"/>
-                <a:ea typeface="Courier New" pitchFamily="34" charset="-122"/>
-                <a:cs typeface="Courier New" pitchFamily="34" charset="-120"/>
-              </a:rPr>
-              <a:t>plt.ylabel(</a:t>
-            </a:r>
-            <a:pPr algn="l" indent="0" marL="0">
-              <a:lnSpc>
-                <a:spcPts val="2730"/>
-              </a:lnSpc>
-              <a:buNone/>
-            </a:pPr>
-            <a:r>
-              <a:rPr lang="en-US" sz="2100" dirty="0">
-                <a:solidFill>
-                  <a:srgbClr val="E0BE36"/>
-                </a:solidFill>
-                <a:latin typeface="Courier New" pitchFamily="34" charset="0"/>
-                <a:ea typeface="Courier New" pitchFamily="34" charset="-122"/>
-                <a:cs typeface="Courier New" pitchFamily="34" charset="-120"/>
-              </a:rPr>
-              <a:t>"Revenue that day (UGX)"</a:t>
-            </a:r>
-            <a:pPr algn="l" indent="0" marL="0">
-              <a:lnSpc>
-                <a:spcPts val="2730"/>
-              </a:lnSpc>
-              <a:buNone/>
-            </a:pPr>
-            <a:r>
-              <a:rPr lang="en-US" sz="2100" dirty="0">
-                <a:solidFill>
-                  <a:srgbClr val="FFFFFF"/>
-                </a:solidFill>
-                <a:latin typeface="Courier New" pitchFamily="34" charset="0"/>
-                <a:ea typeface="Courier New" pitchFamily="34" charset="-122"/>
-                <a:cs typeface="Courier New" pitchFamily="34" charset="-120"/>
-              </a:rPr>
-              <a:t>)</a:t>
-            </a:r>
-            <a:endParaRPr lang="en-US" sz="2100" dirty="0"/>
-          </a:p>
-          <a:p>
-            <a:pPr algn="l" indent="0" marL="0">
-              <a:lnSpc>
-                <a:spcPts val="2730"/>
-              </a:lnSpc>
-              <a:buNone/>
-            </a:pPr>
-            <a:r>
-              <a:rPr lang="en-US" sz="2100" dirty="0">
-                <a:solidFill>
-                  <a:srgbClr val="FFFFFF"/>
-                </a:solidFill>
-                <a:latin typeface="Courier New" pitchFamily="34" charset="0"/>
-                <a:ea typeface="Courier New" pitchFamily="34" charset="-122"/>
-                <a:cs typeface="Courier New" pitchFamily="34" charset="-120"/>
-              </a:rPr>
-              <a:t>plt.show()</a:t>
-            </a:r>
-            <a:endParaRPr lang="en-US" sz="2100" dirty="0"/>
-          </a:p>
-        </p:txBody>
-      </p:sp>
-      <p:sp>
-        <p:nvSpPr>
-          <p:cNvPr id="5" name="Text 3"/>
-          <p:cNvSpPr txBox="1"/>
-          <p:nvPr/>
-        </p:nvSpPr>
-        <p:spPr>
-          <a:xfrm>
-            <a:off x="640080" y="4001262"/>
-            <a:ext cx="8046720" cy="2262378"/>
-          </a:xfrm>
-          <a:prstGeom prst="rect">
-            <a:avLst/>
-          </a:prstGeom>
-          <a:noFill/>
-          <a:ln/>
-        </p:spPr>
-        <p:txBody>
-          <a:bodyPr wrap="square" lIns="0" tIns="0" rIns="0" bIns="0" rtlCol="0" anchor="t"/>
-          <a:lstStyle/>
-          <a:p>
-            <a:pPr algn="l" indent="0" marL="0">
-              <a:lnSpc>
-                <a:spcPts val="2880"/>
-              </a:lnSpc>
-              <a:spcAft>
-                <a:spcPts val="1010"/>
-              </a:spcAft>
-              <a:buNone/>
-            </a:pPr>
-            <a:r>
-              <a:rPr lang="en-US" sz="2400" dirty="0">
-                <a:solidFill>
-                  <a:srgbClr val="111111"/>
-                </a:solidFill>
-                <a:latin typeface="Lato" pitchFamily="34" charset="0"/>
-                <a:ea typeface="Lato" pitchFamily="34" charset="-122"/>
-                <a:cs typeface="Lato" pitchFamily="34" charset="-120"/>
-              </a:rPr>
-              <a:t>Predict the shape of the histogram of sale values: balanced, or bunched at the low end with a long tail?</a:t>
-            </a:r>
-            <a:endParaRPr lang="en-US" sz="2400" dirty="0"/>
-          </a:p>
-          <a:p>
-            <a:pPr algn="l" indent="0" marL="0">
-              <a:lnSpc>
-                <a:spcPts val="2880"/>
-              </a:lnSpc>
-              <a:spcAft>
-                <a:spcPts val="1010"/>
-              </a:spcAft>
-              <a:buNone/>
-            </a:pPr>
-            <a:r>
-              <a:rPr lang="en-US" sz="2400" dirty="0">
-                <a:solidFill>
-                  <a:srgbClr val="111111"/>
-                </a:solidFill>
-                <a:latin typeface="Lato" pitchFamily="34" charset="0"/>
-                <a:ea typeface="Lato" pitchFamily="34" charset="-122"/>
-                <a:cs typeface="Lato" pitchFamily="34" charset="-120"/>
-              </a:rPr>
-              <a:t>Write your guess on paper before we run it.</a:t>
-            </a:r>
-            <a:endParaRPr lang="en-US" sz="2400" dirty="0"/>
           </a:p>
         </p:txBody>
       </p:sp>
       <p:pic>
         <p:nvPicPr>
-          <p:cNvPr id="6" name="Image 0" descr="A page and a pen">    </p:cNvPr>
+          <p:cNvPr id="3" name="Image 0" descr="A chart the code draws">    </p:cNvPr>
           <p:cNvPicPr>
             <a:picLocks noChangeAspect="1"/>
           </p:cNvPicPr>
@@ -5827,14 +5642,83 @@
         </p:blipFill>
         <p:spPr>
           <a:xfrm>
-            <a:off x="10149840" y="4983480"/>
-            <a:ext cx="1371600" cy="1188720"/>
+            <a:off x="828606" y="1600200"/>
+            <a:ext cx="4972189" cy="3017520"/>
           </a:xfrm>
           <a:prstGeom prst="rect">
             <a:avLst/>
           </a:prstGeom>
         </p:spPr>
       </p:pic>
+      <p:pic>
+        <p:nvPicPr>
+          <p:cNvPr id="4" name="Image 1" descr="A chart the code draws">    </p:cNvPr>
+          <p:cNvPicPr>
+            <a:picLocks noChangeAspect="1"/>
+          </p:cNvPicPr>
+          <p:nvPr/>
+        </p:nvPicPr>
+        <p:blipFill>
+          <a:blip r:embed="rId2"/>
+          <a:stretch>
+            <a:fillRect/>
+          </a:stretch>
+        </p:blipFill>
+        <p:spPr>
+          <a:xfrm>
+            <a:off x="6255423" y="1600200"/>
+            <a:ext cx="5182794" cy="3017520"/>
+          </a:xfrm>
+          <a:prstGeom prst="rect">
+            <a:avLst/>
+          </a:prstGeom>
+        </p:spPr>
+      </p:pic>
+      <p:sp>
+        <p:nvSpPr>
+          <p:cNvPr id="5" name="Text 1"/>
+          <p:cNvSpPr txBox="1"/>
+          <p:nvPr/>
+        </p:nvSpPr>
+        <p:spPr>
+          <a:xfrm>
+            <a:off x="640080" y="4800600"/>
+            <a:ext cx="10881360" cy="1463040"/>
+          </a:xfrm>
+          <a:prstGeom prst="rect">
+            <a:avLst/>
+          </a:prstGeom>
+          <a:noFill/>
+          <a:ln/>
+        </p:spPr>
+        <p:txBody>
+          <a:bodyPr wrap="square" lIns="0" tIns="0" rIns="0" bIns="0" rtlCol="0" anchor="t"/>
+          <a:lstStyle/>
+          <a:p>
+            <a:pPr algn="l" indent="0" marL="0">
+              <a:lnSpc>
+                <a:spcPts val="2880"/>
+              </a:lnSpc>
+              <a:spcAft>
+                <a:spcPts val="1010"/>
+              </a:spcAft>
+              <a:buNone/>
+            </a:pPr>
+            <a:r>
+              <a:rPr lang="en-US" sz="2400" dirty="0">
+                <a:solidFill>
+                  <a:srgbClr val="111111"/>
+                </a:solidFill>
+                <a:latin typeface="Lato" pitchFamily="34" charset="0"/>
+                <a:ea typeface="Lato" pitchFamily="34" charset="-122"/>
+                <a:cs typeface="Lato" pitchFamily="34" charset="-120"/>
+              </a:rPr>
+              <a:t>The histogram is bunched at the low end with a long tail to the right, because most sales are small and a few are very large. The scatter plot has 180 dots, one for each shop and day.</a:t>
+            </a:r>
+            <a:endParaRPr lang="en-US" sz="2400" dirty="0"/>
+          </a:p>
+        </p:txBody>
+      </p:sp>
       <p:sp>
         <p:nvSpPr>
           <p:cNvPr id="25" name="Slide Number Placeholder 0"/>
@@ -5943,7 +5827,7 @@
                 <a:ea typeface="Lato" pitchFamily="34" charset="-122"/>
                 <a:cs typeface="Lato" pitchFamily="34" charset="-120"/>
               </a:rPr>
-              <a:t>Run it: Histogram and scatter plot</a:t>
+              <a:t>Investigate: Histogram and scatter plot</a:t>
             </a:r>
             <a:endParaRPr lang="en-US" sz="3800" dirty="0"/>
           </a:p>
@@ -5951,7 +5835,7 @@
       </p:sp>
       <p:pic>
         <p:nvPicPr>
-          <p:cNvPr id="3" name="Image 0" descr="A chart the code draws">    </p:cNvPr>
+          <p:cNvPr id="3" name="Image 0" descr="Look closely">    </p:cNvPr>
           <p:cNvPicPr>
             <a:picLocks noChangeAspect="1"/>
           </p:cNvPicPr>
@@ -5965,48 +5849,24 @@
         </p:blipFill>
         <p:spPr>
           <a:xfrm>
-            <a:off x="828606" y="1600200"/>
-            <a:ext cx="4972189" cy="3017520"/>
+            <a:off x="9875520" y="4480560"/>
+            <a:ext cx="1645920" cy="1645920"/>
           </a:xfrm>
           <a:prstGeom prst="rect">
             <a:avLst/>
           </a:prstGeom>
         </p:spPr>
       </p:pic>
-      <p:pic>
-        <p:nvPicPr>
-          <p:cNvPr id="4" name="Image 1" descr="A chart the code draws">    </p:cNvPr>
-          <p:cNvPicPr>
-            <a:picLocks noChangeAspect="1"/>
-          </p:cNvPicPr>
-          <p:nvPr/>
-        </p:nvPicPr>
-        <p:blipFill>
-          <a:blip r:embed="rId2"/>
-          <a:stretch>
-            <a:fillRect/>
-          </a:stretch>
-        </p:blipFill>
-        <p:spPr>
-          <a:xfrm>
-            <a:off x="6255423" y="1600200"/>
-            <a:ext cx="5182794" cy="3017520"/>
-          </a:xfrm>
-          <a:prstGeom prst="rect">
-            <a:avLst/>
-          </a:prstGeom>
-        </p:spPr>
-      </p:pic>
-      <p:sp>
-        <p:nvSpPr>
-          <p:cNvPr id="5" name="Text 1"/>
+      <p:sp>
+        <p:nvSpPr>
+          <p:cNvPr id="4" name="Text 1"/>
           <p:cNvSpPr txBox="1"/>
           <p:nvPr/>
         </p:nvSpPr>
         <p:spPr>
           <a:xfrm>
-            <a:off x="640080" y="4800600"/>
-            <a:ext cx="10881360" cy="1463040"/>
+            <a:off x="640080" y="1737360"/>
+            <a:ext cx="8961120" cy="4389120"/>
           </a:xfrm>
           <a:prstGeom prst="rect">
             <a:avLst/>
@@ -6020,15 +5880,15 @@
           <a:p>
             <a:pPr algn="l" indent="0" marL="0">
               <a:lnSpc>
-                <a:spcPts val="2880"/>
+                <a:spcPts val="4320"/>
               </a:lnSpc>
               <a:spcAft>
-                <a:spcPts val="1010"/>
+                <a:spcPts val="3960"/>
               </a:spcAft>
               <a:buNone/>
             </a:pPr>
             <a:r>
-              <a:rPr lang="en-US" sz="2400" dirty="0">
+              <a:rPr lang="en-US" sz="3600" dirty="0">
                 <a:solidFill>
                   <a:srgbClr val="111111"/>
                 </a:solidFill>
@@ -6036,9 +5896,32 @@
                 <a:ea typeface="Lato" pitchFamily="34" charset="-122"/>
                 <a:cs typeface="Lato" pitchFamily="34" charset="-120"/>
               </a:rPr>
-              <a:t>The histogram is bunched at the low end with a long tail to the right, because most sales are small and a few are very large. The scatter plot has 180 dots, one for each shop and day.</a:t>
-            </a:r>
-            <a:endParaRPr lang="en-US" sz="2400" dirty="0"/>
+              <a:t>1.  What does the long tail in the histogram tell us?</a:t>
+            </a:r>
+            <a:endParaRPr lang="en-US" sz="3600" dirty="0"/>
+          </a:p>
+          <a:p>
+            <a:pPr algn="l" indent="0" marL="0">
+              <a:lnSpc>
+                <a:spcPts val="4320"/>
+              </a:lnSpc>
+              <a:spcAft>
+                <a:spcPts val="3960"/>
+              </a:spcAft>
+              <a:buNone/>
+            </a:pPr>
+            <a:r>
+              <a:rPr lang="en-US" sz="3600" dirty="0">
+                <a:solidFill>
+                  <a:srgbClr val="111111"/>
+                </a:solidFill>
+                <a:latin typeface="Lato" pitchFamily="34" charset="0"/>
+                <a:ea typeface="Lato" pitchFamily="34" charset="-122"/>
+                <a:cs typeface="Lato" pitchFamily="34" charset="-120"/>
+              </a:rPr>
+              <a:t>2.  Does the scatter plot show that customers cause revenue?</a:t>
+            </a:r>
+            <a:endParaRPr lang="en-US" sz="3600" dirty="0"/>
           </a:p>
         </p:txBody>
       </p:sp>
@@ -6150,15 +6033,83 @@
                 <a:ea typeface="Lato" pitchFamily="34" charset="-122"/>
                 <a:cs typeface="Lato" pitchFamily="34" charset="-120"/>
               </a:rPr>
-              <a:t>Investigate: Histogram and scatter plot</a:t>
+              <a:t>Modify: change one thing</a:t>
             </a:r>
             <a:endParaRPr lang="en-US" sz="3800" dirty="0"/>
+          </a:p>
+        </p:txBody>
+      </p:sp>
+      <p:sp>
+        <p:nvSpPr>
+          <p:cNvPr id="3" name="Text 1"/>
+          <p:cNvSpPr txBox="1"/>
+          <p:nvPr/>
+        </p:nvSpPr>
+        <p:spPr>
+          <a:xfrm>
+            <a:off x="640080" y="1737360"/>
+            <a:ext cx="6035040" cy="4206240"/>
+          </a:xfrm>
+          <a:prstGeom prst="rect">
+            <a:avLst/>
+          </a:prstGeom>
+          <a:noFill/>
+          <a:ln/>
+        </p:spPr>
+        <p:txBody>
+          <a:bodyPr wrap="square" lIns="0" tIns="0" rIns="0" bIns="0" rtlCol="0" anchor="t"/>
+          <a:lstStyle/>
+          <a:p>
+            <a:pPr algn="l" indent="0" marL="0">
+              <a:lnSpc>
+                <a:spcPts val="4320"/>
+              </a:lnSpc>
+              <a:spcAft>
+                <a:spcPts val="3240"/>
+              </a:spcAft>
+              <a:buNone/>
+            </a:pPr>
+            <a:r>
+              <a:rPr lang="en-US" sz="3600" dirty="0">
+                <a:solidFill>
+                  <a:srgbClr val="111111"/>
+                </a:solidFill>
+                <a:latin typeface="Lato" pitchFamily="34" charset="0"/>
+                <a:ea typeface="Lato" pitchFamily="34" charset="-122"/>
+                <a:cs typeface="Lato" pitchFamily="34" charset="-120"/>
+              </a:rPr>
+              <a:t>Change bins=30 to bins=10 and describe what the histogram loses.</a:t>
+            </a:r>
+            <a:endParaRPr lang="en-US" sz="3600" dirty="0"/>
+          </a:p>
+          <a:p>
+            <a:pPr algn="l" indent="0" marL="0">
+              <a:lnSpc>
+                <a:spcPts val="4320"/>
+              </a:lnSpc>
+              <a:spcAft>
+                <a:spcPts val="3240"/>
+              </a:spcAft>
+              <a:buNone/>
+            </a:pPr>
+            <a:r>
+              <a:rPr lang="en-US" sz="3600" dirty="0">
+                <a:solidFill>
+                  <a:srgbClr val="111111"/>
+                </a:solidFill>
+                <a:latin typeface="Lato" pitchFamily="34" charset="0"/>
+                <a:ea typeface="Lato" pitchFamily="34" charset="-122"/>
+                <a:cs typeface="Lato" pitchFamily="34" charset="-120"/>
+              </a:rPr>
+              <a:t>Then tell your neighbour what changed and how you know.</a:t>
+            </a:r>
+            <a:endParaRPr lang="en-US" sz="3600" dirty="0"/>
           </a:p>
         </p:txBody>
       </p:sp>
       <p:pic>
         <p:nvPicPr>
-          <p:cNvPr id="3" name="Image 0" descr="Look closely">    </p:cNvPr>
+          <p:cNvPr id="4" name="Image 0" descr="Change one thing">    </p:cNvPr>
           <p:cNvPicPr>
             <a:picLocks noChangeAspect="1"/>
           </p:cNvPicPr>
@@ -6172,82 +6123,14 @@
         </p:blipFill>
         <p:spPr>
           <a:xfrm>
-            <a:off x="9875520" y="4480560"/>
-            <a:ext cx="1645920" cy="1645920"/>
+            <a:off x="9418320" y="2103120"/>
+            <a:ext cx="1828800" cy="1828800"/>
           </a:xfrm>
           <a:prstGeom prst="rect">
             <a:avLst/>
           </a:prstGeom>
         </p:spPr>
       </p:pic>
-      <p:sp>
-        <p:nvSpPr>
-          <p:cNvPr id="4" name="Text 1"/>
-          <p:cNvSpPr txBox="1"/>
-          <p:nvPr/>
-        </p:nvSpPr>
-        <p:spPr>
-          <a:xfrm>
-            <a:off x="640080" y="1737360"/>
-            <a:ext cx="8961120" cy="4389120"/>
-          </a:xfrm>
-          <a:prstGeom prst="rect">
-            <a:avLst/>
-          </a:prstGeom>
-          <a:noFill/>
-          <a:ln/>
-        </p:spPr>
-        <p:txBody>
-          <a:bodyPr wrap="square" lIns="0" tIns="0" rIns="0" bIns="0" rtlCol="0" anchor="t"/>
-          <a:lstStyle/>
-          <a:p>
-            <a:pPr algn="l" indent="0" marL="0">
-              <a:lnSpc>
-                <a:spcPts val="4320"/>
-              </a:lnSpc>
-              <a:spcAft>
-                <a:spcPts val="3960"/>
-              </a:spcAft>
-              <a:buNone/>
-            </a:pPr>
-            <a:r>
-              <a:rPr lang="en-US" sz="3600" dirty="0">
-                <a:solidFill>
-                  <a:srgbClr val="111111"/>
-                </a:solidFill>
-                <a:latin typeface="Lato" pitchFamily="34" charset="0"/>
-                <a:ea typeface="Lato" pitchFamily="34" charset="-122"/>
-                <a:cs typeface="Lato" pitchFamily="34" charset="-120"/>
-              </a:rPr>
-              <a:t>1.  What does the long tail in the histogram tell us?</a:t>
-            </a:r>
-            <a:endParaRPr lang="en-US" sz="3600" dirty="0"/>
-          </a:p>
-          <a:p>
-            <a:pPr algn="l" indent="0" marL="0">
-              <a:lnSpc>
-                <a:spcPts val="4320"/>
-              </a:lnSpc>
-              <a:spcAft>
-                <a:spcPts val="3960"/>
-              </a:spcAft>
-              <a:buNone/>
-            </a:pPr>
-            <a:r>
-              <a:rPr lang="en-US" sz="3600" dirty="0">
-                <a:solidFill>
-                  <a:srgbClr val="111111"/>
-                </a:solidFill>
-                <a:latin typeface="Lato" pitchFamily="34" charset="0"/>
-                <a:ea typeface="Lato" pitchFamily="34" charset="-122"/>
-                <a:cs typeface="Lato" pitchFamily="34" charset="-120"/>
-              </a:rPr>
-              <a:t>2.  Does the scatter plot show that customers cause revenue?</a:t>
-            </a:r>
-            <a:endParaRPr lang="en-US" sz="3600" dirty="0"/>
-          </a:p>
-        </p:txBody>
-      </p:sp>
       <p:sp>
         <p:nvSpPr>
           <p:cNvPr id="25" name="Slide Number Placeholder 0"/>
@@ -6494,83 +6377,15 @@
                 <a:ea typeface="Lato" pitchFamily="34" charset="-122"/>
                 <a:cs typeface="Lato" pitchFamily="34" charset="-120"/>
               </a:rPr>
-              <a:t>Modify: change one thing</a:t>
+              <a:t>A line chart joins values over time</a:t>
             </a:r>
             <a:endParaRPr lang="en-US" sz="3800" dirty="0"/>
-          </a:p>
-        </p:txBody>
-      </p:sp>
-      <p:sp>
-        <p:nvSpPr>
-          <p:cNvPr id="3" name="Text 1"/>
-          <p:cNvSpPr txBox="1"/>
-          <p:nvPr/>
-        </p:nvSpPr>
-        <p:spPr>
-          <a:xfrm>
-            <a:off x="640080" y="1737360"/>
-            <a:ext cx="6035040" cy="4206240"/>
-          </a:xfrm>
-          <a:prstGeom prst="rect">
-            <a:avLst/>
-          </a:prstGeom>
-          <a:noFill/>
-          <a:ln/>
-        </p:spPr>
-        <p:txBody>
-          <a:bodyPr wrap="square" lIns="0" tIns="0" rIns="0" bIns="0" rtlCol="0" anchor="t"/>
-          <a:lstStyle/>
-          <a:p>
-            <a:pPr algn="l" indent="0" marL="0">
-              <a:lnSpc>
-                <a:spcPts val="4320"/>
-              </a:lnSpc>
-              <a:spcAft>
-                <a:spcPts val="3240"/>
-              </a:spcAft>
-              <a:buNone/>
-            </a:pPr>
-            <a:r>
-              <a:rPr lang="en-US" sz="3600" dirty="0">
-                <a:solidFill>
-                  <a:srgbClr val="111111"/>
-                </a:solidFill>
-                <a:latin typeface="Lato" pitchFamily="34" charset="0"/>
-                <a:ea typeface="Lato" pitchFamily="34" charset="-122"/>
-                <a:cs typeface="Lato" pitchFamily="34" charset="-120"/>
-              </a:rPr>
-              <a:t>Change bins=30 to bins=10 and describe what the histogram loses.</a:t>
-            </a:r>
-            <a:endParaRPr lang="en-US" sz="3600" dirty="0"/>
-          </a:p>
-          <a:p>
-            <a:pPr algn="l" indent="0" marL="0">
-              <a:lnSpc>
-                <a:spcPts val="4320"/>
-              </a:lnSpc>
-              <a:spcAft>
-                <a:spcPts val="3240"/>
-              </a:spcAft>
-              <a:buNone/>
-            </a:pPr>
-            <a:r>
-              <a:rPr lang="en-US" sz="3600" dirty="0">
-                <a:solidFill>
-                  <a:srgbClr val="111111"/>
-                </a:solidFill>
-                <a:latin typeface="Lato" pitchFamily="34" charset="0"/>
-                <a:ea typeface="Lato" pitchFamily="34" charset="-122"/>
-                <a:cs typeface="Lato" pitchFamily="34" charset="-120"/>
-              </a:rPr>
-              <a:t>Then tell your neighbour what changed and how you know.</a:t>
-            </a:r>
-            <a:endParaRPr lang="en-US" sz="3600" dirty="0"/>
           </a:p>
         </p:txBody>
       </p:sp>
       <p:pic>
         <p:nvPicPr>
-          <p:cNvPr id="4" name="Image 0" descr="Change one thing">    </p:cNvPr>
+          <p:cNvPr id="3" name="Image 0" descr="A line chart joins values over time">    </p:cNvPr>
           <p:cNvPicPr>
             <a:picLocks noChangeAspect="1"/>
           </p:cNvPicPr>
@@ -6584,14 +6399,105 @@
         </p:blipFill>
         <p:spPr>
           <a:xfrm>
-            <a:off x="9418320" y="2103120"/>
-            <a:ext cx="1828800" cy="1828800"/>
+            <a:off x="640080" y="1604170"/>
+            <a:ext cx="7040880" cy="4518341"/>
           </a:xfrm>
           <a:prstGeom prst="rect">
             <a:avLst/>
           </a:prstGeom>
         </p:spPr>
       </p:pic>
+      <p:sp>
+        <p:nvSpPr>
+          <p:cNvPr id="4" name="Text 1"/>
+          <p:cNvSpPr txBox="1"/>
+          <p:nvPr/>
+        </p:nvSpPr>
+        <p:spPr>
+          <a:xfrm>
+            <a:off x="7955280" y="1783080"/>
+            <a:ext cx="3566160" cy="4297680"/>
+          </a:xfrm>
+          <a:prstGeom prst="rect">
+            <a:avLst/>
+          </a:prstGeom>
+          <a:noFill/>
+          <a:ln/>
+        </p:spPr>
+        <p:txBody>
+          <a:bodyPr wrap="square" lIns="0" tIns="0" rIns="0" bIns="0" rtlCol="0" anchor="t"/>
+          <a:lstStyle/>
+          <a:p>
+            <a:pPr algn="l" indent="0" marL="0">
+              <a:lnSpc>
+                <a:spcPts val="2880"/>
+              </a:lnSpc>
+              <a:spcAft>
+                <a:spcPts val="2020"/>
+              </a:spcAft>
+              <a:buNone/>
+            </a:pPr>
+            <a:r>
+              <a:rPr lang="en-US" sz="2400" dirty="0">
+                <a:solidFill>
+                  <a:srgbClr val="111111"/>
+                </a:solidFill>
+                <a:latin typeface="Lato" pitchFamily="34" charset="0"/>
+                <a:ea typeface="Lato" pitchFamily="34" charset="-122"/>
+                <a:cs typeface="Lato" pitchFamily="34" charset="-120"/>
+              </a:rPr>
+              <a:t>Time runs along the bottom.</a:t>
+            </a:r>
+            <a:endParaRPr lang="en-US" sz="2400" dirty="0"/>
+          </a:p>
+          <a:p>
+            <a:pPr algn="l" indent="0" marL="0">
+              <a:lnSpc>
+                <a:spcPts val="2880"/>
+              </a:lnSpc>
+              <a:spcAft>
+                <a:spcPts val="2020"/>
+              </a:spcAft>
+              <a:buNone/>
+            </a:pPr>
+            <a:r>
+              <a:rPr lang="en-US" sz="2400" dirty="0">
+                <a:solidFill>
+                  <a:srgbClr val="111111"/>
+                </a:solidFill>
+                <a:latin typeface="Lato" pitchFamily="34" charset="0"/>
+                <a:ea typeface="Lato" pitchFamily="34" charset="-122"/>
+                <a:cs typeface="Lato" pitchFamily="34" charset="-120"/>
+              </a:rPr>
+              <a:t>The line joins one day to the next.</a:t>
+            </a:r>
+            <a:endParaRPr lang="en-US" sz="2400" dirty="0"/>
+          </a:p>
+          <a:p>
+            <a:pPr algn="l" indent="0" marL="0">
+              <a:lnSpc>
+                <a:spcPts val="2880"/>
+              </a:lnSpc>
+              <a:spcAft>
+                <a:spcPts val="2020"/>
+              </a:spcAft>
+              <a:buNone/>
+            </a:pPr>
+            <a:r>
+              <a:rPr lang="en-US" sz="2400" dirty="0">
+                <a:solidFill>
+                  <a:srgbClr val="111111"/>
+                </a:solidFill>
+                <a:latin typeface="Lato" pitchFamily="34" charset="0"/>
+                <a:ea typeface="Lato" pitchFamily="34" charset="-122"/>
+                <a:cs typeface="Lato" pitchFamily="34" charset="-120"/>
+              </a:rPr>
+              <a:t>Crowded date labels can be rotated or thinned.</a:t>
+            </a:r>
+            <a:endParaRPr lang="en-US" sz="2400" dirty="0"/>
+          </a:p>
+        </p:txBody>
+      </p:sp>
       <p:sp>
         <p:nvSpPr>
           <p:cNvPr id="25" name="Slide Number Placeholder 0"/>
@@ -6700,15 +6606,129 @@
                 <a:ea typeface="Lato" pitchFamily="34" charset="-122"/>
                 <a:cs typeface="Lato" pitchFamily="34" charset="-120"/>
               </a:rPr>
-              <a:t>A line chart joins values over time</a:t>
+              <a:t>Make: your own version</a:t>
             </a:r>
             <a:endParaRPr lang="en-US" sz="3800" dirty="0"/>
+          </a:p>
+        </p:txBody>
+      </p:sp>
+      <p:sp>
+        <p:nvSpPr>
+          <p:cNvPr id="3" name="Text 1"/>
+          <p:cNvSpPr txBox="1"/>
+          <p:nvPr/>
+        </p:nvSpPr>
+        <p:spPr>
+          <a:xfrm>
+            <a:off x="640080" y="1737360"/>
+            <a:ext cx="6949440" cy="4480560"/>
+          </a:xfrm>
+          <a:prstGeom prst="rect">
+            <a:avLst/>
+          </a:prstGeom>
+          <a:noFill/>
+          <a:ln/>
+        </p:spPr>
+        <p:txBody>
+          <a:bodyPr wrap="square" lIns="0" tIns="0" rIns="0" bIns="0" rtlCol="0" anchor="t"/>
+          <a:lstStyle/>
+          <a:p>
+            <a:pPr algn="l" indent="0" marL="0">
+              <a:lnSpc>
+                <a:spcPts val="3240"/>
+              </a:lnSpc>
+              <a:spcAft>
+                <a:spcPts val="2020"/>
+              </a:spcAft>
+              <a:buNone/>
+            </a:pPr>
+            <a:r>
+              <a:rPr lang="en-US" sz="2700" dirty="0">
+                <a:solidFill>
+                  <a:srgbClr val="111111"/>
+                </a:solidFill>
+                <a:latin typeface="Lato" pitchFamily="34" charset="0"/>
+                <a:ea typeface="Lato" pitchFamily="34" charset="-122"/>
+                <a:cs typeface="Lato" pitchFamily="34" charset="-120"/>
+              </a:rPr>
+              <a:t>Chart the Sunrise revenue by branch.</a:t>
+            </a:r>
+            <a:endParaRPr lang="en-US" sz="2700" dirty="0"/>
+          </a:p>
+          <a:p>
+            <a:pPr algn="l" indent="0" marL="0">
+              <a:lnSpc>
+                <a:spcPts val="3240"/>
+              </a:lnSpc>
+              <a:spcAft>
+                <a:spcPts val="2020"/>
+              </a:spcAft>
+              <a:buNone/>
+            </a:pPr>
+            <a:r>
+              <a:rPr lang="en-US" sz="2700" dirty="0">
+                <a:solidFill>
+                  <a:srgbClr val="111111"/>
+                </a:solidFill>
+                <a:latin typeface="Lato" pitchFamily="34" charset="0"/>
+                <a:ea typeface="Lato" pitchFamily="34" charset="-122"/>
+                <a:cs typeface="Lato" pitchFamily="34" charset="-120"/>
+              </a:rPr>
+              <a:t>Use a dictionary to turn the ids 1, 2 and 3 into the names Central Market, Campus Gate and Roadside.</a:t>
+            </a:r>
+            <a:endParaRPr lang="en-US" sz="2700" dirty="0"/>
+          </a:p>
+          <a:p>
+            <a:pPr algn="l" indent="0" marL="0">
+              <a:lnSpc>
+                <a:spcPts val="3240"/>
+              </a:lnSpc>
+              <a:spcAft>
+                <a:spcPts val="2020"/>
+              </a:spcAft>
+              <a:buNone/>
+            </a:pPr>
+            <a:r>
+              <a:rPr lang="en-US" sz="2700" dirty="0">
+                <a:solidFill>
+                  <a:srgbClr val="111111"/>
+                </a:solidFill>
+                <a:latin typeface="Lato" pitchFamily="34" charset="0"/>
+                <a:ea typeface="Lato" pitchFamily="34" charset="-122"/>
+                <a:cs typeface="Lato" pitchFamily="34" charset="-120"/>
+              </a:rPr>
+              <a:t>Label the axis, start it at zero and write one finding and one limitation.</a:t>
+            </a:r>
+            <a:endParaRPr lang="en-US" sz="2700" dirty="0"/>
+          </a:p>
+          <a:p>
+            <a:pPr algn="l" indent="0" marL="0">
+              <a:lnSpc>
+                <a:spcPts val="3240"/>
+              </a:lnSpc>
+              <a:spcAft>
+                <a:spcPts val="2020"/>
+              </a:spcAft>
+              <a:buNone/>
+            </a:pPr>
+            <a:r>
+              <a:rPr lang="en-US" sz="2700" dirty="0">
+                <a:solidFill>
+                  <a:srgbClr val="111111"/>
+                </a:solidFill>
+                <a:latin typeface="Lato" pitchFamily="34" charset="0"/>
+                <a:ea typeface="Lato" pitchFamily="34" charset="-122"/>
+                <a:cs typeface="Lato" pitchFamily="34" charset="-120"/>
+              </a:rPr>
+              <a:t>Save it as DA11. Write two sentences: what you changed and how you checked it.</a:t>
+            </a:r>
+            <a:endParaRPr lang="en-US" sz="2700" dirty="0"/>
           </a:p>
         </p:txBody>
       </p:sp>
       <p:pic>
         <p:nvPicPr>
-          <p:cNvPr id="3" name="Image 0" descr="A line chart joins values over time">    </p:cNvPr>
+          <p:cNvPr id="4" name="Image 0" descr="A notebook saved with a tick">    </p:cNvPr>
           <p:cNvPicPr>
             <a:picLocks noChangeAspect="1"/>
           </p:cNvPicPr>
@@ -6722,105 +6742,14 @@
         </p:blipFill>
         <p:spPr>
           <a:xfrm>
-            <a:off x="640080" y="1604170"/>
-            <a:ext cx="7040880" cy="4518341"/>
+            <a:off x="8138160" y="1920240"/>
+            <a:ext cx="3474720" cy="3291840"/>
           </a:xfrm>
           <a:prstGeom prst="rect">
             <a:avLst/>
           </a:prstGeom>
         </p:spPr>
       </p:pic>
-      <p:sp>
-        <p:nvSpPr>
-          <p:cNvPr id="4" name="Text 1"/>
-          <p:cNvSpPr txBox="1"/>
-          <p:nvPr/>
-        </p:nvSpPr>
-        <p:spPr>
-          <a:xfrm>
-            <a:off x="7955280" y="1783080"/>
-            <a:ext cx="3566160" cy="4297680"/>
-          </a:xfrm>
-          <a:prstGeom prst="rect">
-            <a:avLst/>
-          </a:prstGeom>
-          <a:noFill/>
-          <a:ln/>
-        </p:spPr>
-        <p:txBody>
-          <a:bodyPr wrap="square" lIns="0" tIns="0" rIns="0" bIns="0" rtlCol="0" anchor="t"/>
-          <a:lstStyle/>
-          <a:p>
-            <a:pPr algn="l" indent="0" marL="0">
-              <a:lnSpc>
-                <a:spcPts val="2880"/>
-              </a:lnSpc>
-              <a:spcAft>
-                <a:spcPts val="2020"/>
-              </a:spcAft>
-              <a:buNone/>
-            </a:pPr>
-            <a:r>
-              <a:rPr lang="en-US" sz="2400" dirty="0">
-                <a:solidFill>
-                  <a:srgbClr val="111111"/>
-                </a:solidFill>
-                <a:latin typeface="Lato" pitchFamily="34" charset="0"/>
-                <a:ea typeface="Lato" pitchFamily="34" charset="-122"/>
-                <a:cs typeface="Lato" pitchFamily="34" charset="-120"/>
-              </a:rPr>
-              <a:t>Time runs along the bottom.</a:t>
-            </a:r>
-            <a:endParaRPr lang="en-US" sz="2400" dirty="0"/>
-          </a:p>
-          <a:p>
-            <a:pPr algn="l" indent="0" marL="0">
-              <a:lnSpc>
-                <a:spcPts val="2880"/>
-              </a:lnSpc>
-              <a:spcAft>
-                <a:spcPts val="2020"/>
-              </a:spcAft>
-              <a:buNone/>
-            </a:pPr>
-            <a:r>
-              <a:rPr lang="en-US" sz="2400" dirty="0">
-                <a:solidFill>
-                  <a:srgbClr val="111111"/>
-                </a:solidFill>
-                <a:latin typeface="Lato" pitchFamily="34" charset="0"/>
-                <a:ea typeface="Lato" pitchFamily="34" charset="-122"/>
-                <a:cs typeface="Lato" pitchFamily="34" charset="-120"/>
-              </a:rPr>
-              <a:t>The line joins one day to the next.</a:t>
-            </a:r>
-            <a:endParaRPr lang="en-US" sz="2400" dirty="0"/>
-          </a:p>
-          <a:p>
-            <a:pPr algn="l" indent="0" marL="0">
-              <a:lnSpc>
-                <a:spcPts val="2880"/>
-              </a:lnSpc>
-              <a:spcAft>
-                <a:spcPts val="2020"/>
-              </a:spcAft>
-              <a:buNone/>
-            </a:pPr>
-            <a:r>
-              <a:rPr lang="en-US" sz="2400" dirty="0">
-                <a:solidFill>
-                  <a:srgbClr val="111111"/>
-                </a:solidFill>
-                <a:latin typeface="Lato" pitchFamily="34" charset="0"/>
-                <a:ea typeface="Lato" pitchFamily="34" charset="-122"/>
-                <a:cs typeface="Lato" pitchFamily="34" charset="-120"/>
-              </a:rPr>
-              <a:t>Crowded date labels can be rotated or thinned.</a:t>
-            </a:r>
-            <a:endParaRPr lang="en-US" sz="2400" dirty="0"/>
-          </a:p>
-        </p:txBody>
-      </p:sp>
       <p:sp>
         <p:nvSpPr>
           <p:cNvPr id="25" name="Slide Number Placeholder 0"/>
@@ -6929,83 +6858,15 @@
                 <a:ea typeface="Lato" pitchFamily="34" charset="-122"/>
                 <a:cs typeface="Lato" pitchFamily="34" charset="-120"/>
               </a:rPr>
-              <a:t>Make: your own version</a:t>
+              <a:t>Two errors you may meet today</a:t>
             </a:r>
             <a:endParaRPr lang="en-US" sz="3800" dirty="0"/>
-          </a:p>
-        </p:txBody>
-      </p:sp>
-      <p:sp>
-        <p:nvSpPr>
-          <p:cNvPr id="3" name="Text 1"/>
-          <p:cNvSpPr txBox="1"/>
-          <p:nvPr/>
-        </p:nvSpPr>
-        <p:spPr>
-          <a:xfrm>
-            <a:off x="640080" y="1737360"/>
-            <a:ext cx="6949440" cy="4480560"/>
-          </a:xfrm>
-          <a:prstGeom prst="rect">
-            <a:avLst/>
-          </a:prstGeom>
-          <a:noFill/>
-          <a:ln/>
-        </p:spPr>
-        <p:txBody>
-          <a:bodyPr wrap="square" lIns="0" tIns="0" rIns="0" bIns="0" rtlCol="0" anchor="t"/>
-          <a:lstStyle/>
-          <a:p>
-            <a:pPr algn="l" indent="0" marL="0">
-              <a:lnSpc>
-                <a:spcPts val="3480"/>
-              </a:lnSpc>
-              <a:spcAft>
-                <a:spcPts val="2520"/>
-              </a:spcAft>
-              <a:buNone/>
-            </a:pPr>
-            <a:r>
-              <a:rPr lang="en-US" sz="2900" dirty="0">
-                <a:solidFill>
-                  <a:srgbClr val="111111"/>
-                </a:solidFill>
-                <a:latin typeface="Lato" pitchFamily="34" charset="0"/>
-                <a:ea typeface="Lato" pitchFamily="34" charset="-122"/>
-                <a:cs typeface="Lato" pitchFamily="34" charset="-120"/>
-              </a:rPr>
-              <a:t>Chart the Sunrise revenue by branch. Use a dictionary to turn the ids 1, 2 and 3 into the names Central Market, Campus Gate and Roadside. Label the axis, start it at zero and write one finding and one limitation.</a:t>
-            </a:r>
-            <a:endParaRPr lang="en-US" sz="2900" dirty="0"/>
-          </a:p>
-          <a:p>
-            <a:pPr algn="l" indent="0" marL="0">
-              <a:lnSpc>
-                <a:spcPts val="3480"/>
-              </a:lnSpc>
-              <a:spcAft>
-                <a:spcPts val="2520"/>
-              </a:spcAft>
-              <a:buNone/>
-            </a:pPr>
-            <a:r>
-              <a:rPr lang="en-US" sz="2900" dirty="0">
-                <a:solidFill>
-                  <a:srgbClr val="111111"/>
-                </a:solidFill>
-                <a:latin typeface="Lato" pitchFamily="34" charset="0"/>
-                <a:ea typeface="Lato" pitchFamily="34" charset="-122"/>
-                <a:cs typeface="Lato" pitchFamily="34" charset="-120"/>
-              </a:rPr>
-              <a:t>Save it as DA11. Write two sentences: what you changed and how you checked it.</a:t>
-            </a:r>
-            <a:endParaRPr lang="en-US" sz="2900" dirty="0"/>
           </a:p>
         </p:txBody>
       </p:sp>
       <p:pic>
         <p:nvPicPr>
-          <p:cNvPr id="4" name="Image 0" descr="A notebook saved with a tick">    </p:cNvPr>
+          <p:cNvPr id="3" name="Image 0" descr="Error">    </p:cNvPr>
           <p:cNvPicPr>
             <a:picLocks noChangeAspect="1"/>
           </p:cNvPicPr>
@@ -7019,14 +6880,335 @@
         </p:blipFill>
         <p:spPr>
           <a:xfrm>
-            <a:off x="8138160" y="1920240"/>
-            <a:ext cx="3474720" cy="3291840"/>
+            <a:off x="640080" y="1691640"/>
+            <a:ext cx="822960" cy="822960"/>
           </a:xfrm>
           <a:prstGeom prst="rect">
             <a:avLst/>
           </a:prstGeom>
         </p:spPr>
       </p:pic>
+      <p:sp>
+        <p:nvSpPr>
+          <p:cNvPr id="4" name="Shape 1"/>
+          <p:cNvSpPr/>
+          <p:nvPr/>
+        </p:nvSpPr>
+        <p:spPr>
+          <a:xfrm>
+            <a:off x="1645920" y="1828800"/>
+            <a:ext cx="4023360" cy="1645920"/>
+          </a:xfrm>
+          <a:prstGeom prst="roundRect">
+            <a:avLst>
+              <a:gd name="adj" fmla="val 3333"/>
+            </a:avLst>
+          </a:prstGeom>
+          <a:solidFill>
+            <a:srgbClr val="FFFFFF"/>
+          </a:solidFill>
+          <a:ln w="25400">
+            <a:solidFill>
+              <a:srgbClr val="AE2525"/>
+            </a:solidFill>
+            <a:prstDash val="solid"/>
+          </a:ln>
+        </p:spPr>
+      </p:sp>
+      <p:sp>
+        <p:nvSpPr>
+          <p:cNvPr id="5" name="Text 2"/>
+          <p:cNvSpPr txBox="1"/>
+          <p:nvPr/>
+        </p:nvSpPr>
+        <p:spPr>
+          <a:xfrm>
+            <a:off x="1783080" y="1920240"/>
+            <a:ext cx="3749040" cy="1463040"/>
+          </a:xfrm>
+          <a:prstGeom prst="rect">
+            <a:avLst/>
+          </a:prstGeom>
+          <a:noFill/>
+          <a:ln/>
+        </p:spPr>
+        <p:txBody>
+          <a:bodyPr wrap="square" lIns="0" tIns="0" rIns="0" bIns="0" rtlCol="0" anchor="ctr"/>
+          <a:lstStyle/>
+          <a:p>
+            <a:pPr algn="l" indent="0" marL="0">
+              <a:lnSpc>
+                <a:spcPts val="2500"/>
+              </a:lnSpc>
+              <a:buNone/>
+            </a:pPr>
+            <a:r>
+              <a:rPr lang="en-US" sz="2000" dirty="0">
+                <a:solidFill>
+                  <a:srgbClr val="AE2525"/>
+                </a:solidFill>
+                <a:latin typeface="Courier New" pitchFamily="34" charset="0"/>
+                <a:ea typeface="Courier New" pitchFamily="34" charset="-122"/>
+                <a:cs typeface="Courier New" pitchFamily="34" charset="-120"/>
+              </a:rPr>
+              <a:t>The chart appears empty</a:t>
+            </a:r>
+            <a:endParaRPr lang="en-US" sz="2000" dirty="0"/>
+          </a:p>
+        </p:txBody>
+      </p:sp>
+      <p:sp>
+        <p:nvSpPr>
+          <p:cNvPr id="6" name="Text 3"/>
+          <p:cNvSpPr txBox="1"/>
+          <p:nvPr/>
+        </p:nvSpPr>
+        <p:spPr>
+          <a:xfrm>
+            <a:off x="6035040" y="1664208"/>
+            <a:ext cx="5486400" cy="1965960"/>
+          </a:xfrm>
+          <a:prstGeom prst="rect">
+            <a:avLst/>
+          </a:prstGeom>
+          <a:noFill/>
+          <a:ln/>
+        </p:spPr>
+        <p:txBody>
+          <a:bodyPr wrap="square" lIns="0" tIns="0" rIns="0" bIns="0" rtlCol="0" anchor="t"/>
+          <a:lstStyle/>
+          <a:p>
+            <a:pPr algn="l" indent="0" marL="0">
+              <a:lnSpc>
+                <a:spcPts val="2640"/>
+              </a:lnSpc>
+              <a:spcAft>
+                <a:spcPts val="1300"/>
+              </a:spcAft>
+              <a:buNone/>
+            </a:pPr>
+            <a:r>
+              <a:rPr lang="en-US" sz="2200" dirty="0">
+                <a:solidFill>
+                  <a:srgbClr val="111111"/>
+                </a:solidFill>
+                <a:latin typeface="Lato" pitchFamily="34" charset="0"/>
+                <a:ea typeface="Lato" pitchFamily="34" charset="-122"/>
+                <a:cs typeface="Lato" pitchFamily="34" charset="-120"/>
+              </a:rPr>
+              <a:t>It means: plt.show() ran before the data was added, or the data was empty.</a:t>
+            </a:r>
+            <a:endParaRPr lang="en-US" sz="2200" dirty="0"/>
+          </a:p>
+          <a:p>
+            <a:pPr algn="l" indent="0" marL="0">
+              <a:lnSpc>
+                <a:spcPts val="2640"/>
+              </a:lnSpc>
+              <a:spcAft>
+                <a:spcPts val="1300"/>
+              </a:spcAft>
+              <a:buNone/>
+            </a:pPr>
+            <a:r>
+              <a:rPr lang="en-US" sz="2200" dirty="0">
+                <a:solidFill>
+                  <a:srgbClr val="111111"/>
+                </a:solidFill>
+                <a:latin typeface="Lato" pitchFamily="34" charset="0"/>
+                <a:ea typeface="Lato" pitchFamily="34" charset="-122"/>
+                <a:cs typeface="Lato" pitchFamily="34" charset="-120"/>
+              </a:rPr>
+              <a:t>Fix: Run the cell that creates the table first and print its length.</a:t>
+            </a:r>
+            <a:endParaRPr lang="en-US" sz="2200" dirty="0"/>
+          </a:p>
+        </p:txBody>
+      </p:sp>
+      <p:sp>
+        <p:nvSpPr>
+          <p:cNvPr id="7" name="Shape 4"/>
+          <p:cNvSpPr/>
+          <p:nvPr/>
+        </p:nvSpPr>
+        <p:spPr>
+          <a:xfrm>
+            <a:off x="640080" y="3813048"/>
+            <a:ext cx="10881360" cy="0"/>
+          </a:xfrm>
+          <a:prstGeom prst="line">
+            <a:avLst/>
+          </a:prstGeom>
+          <a:noFill/>
+          <a:ln w="12700">
+            <a:solidFill>
+              <a:srgbClr val="CFCFCF"/>
+            </a:solidFill>
+            <a:prstDash val="solid"/>
+          </a:ln>
+        </p:spPr>
+      </p:sp>
+      <p:pic>
+        <p:nvPicPr>
+          <p:cNvPr id="8" name="Image 1" descr="Error">    </p:cNvPr>
+          <p:cNvPicPr>
+            <a:picLocks noChangeAspect="1"/>
+          </p:cNvPicPr>
+          <p:nvPr/>
+        </p:nvPicPr>
+        <p:blipFill>
+          <a:blip r:embed="rId2"/>
+          <a:stretch>
+            <a:fillRect/>
+          </a:stretch>
+        </p:blipFill>
+        <p:spPr>
+          <a:xfrm>
+            <a:off x="640080" y="4023360"/>
+            <a:ext cx="822960" cy="822960"/>
+          </a:xfrm>
+          <a:prstGeom prst="rect">
+            <a:avLst/>
+          </a:prstGeom>
+        </p:spPr>
+      </p:pic>
+      <p:sp>
+        <p:nvSpPr>
+          <p:cNvPr id="9" name="Shape 5"/>
+          <p:cNvSpPr/>
+          <p:nvPr/>
+        </p:nvSpPr>
+        <p:spPr>
+          <a:xfrm>
+            <a:off x="1645920" y="4160520"/>
+            <a:ext cx="4023360" cy="1645920"/>
+          </a:xfrm>
+          <a:prstGeom prst="roundRect">
+            <a:avLst>
+              <a:gd name="adj" fmla="val 3333"/>
+            </a:avLst>
+          </a:prstGeom>
+          <a:solidFill>
+            <a:srgbClr val="FFFFFF"/>
+          </a:solidFill>
+          <a:ln w="25400">
+            <a:solidFill>
+              <a:srgbClr val="AE2525"/>
+            </a:solidFill>
+            <a:prstDash val="solid"/>
+          </a:ln>
+        </p:spPr>
+      </p:sp>
+      <p:sp>
+        <p:nvSpPr>
+          <p:cNvPr id="10" name="Text 6"/>
+          <p:cNvSpPr txBox="1"/>
+          <p:nvPr/>
+        </p:nvSpPr>
+        <p:spPr>
+          <a:xfrm>
+            <a:off x="1783080" y="4251960"/>
+            <a:ext cx="3749040" cy="1463040"/>
+          </a:xfrm>
+          <a:prstGeom prst="rect">
+            <a:avLst/>
+          </a:prstGeom>
+          <a:noFill/>
+          <a:ln/>
+        </p:spPr>
+        <p:txBody>
+          <a:bodyPr wrap="square" lIns="0" tIns="0" rIns="0" bIns="0" rtlCol="0" anchor="ctr"/>
+          <a:lstStyle/>
+          <a:p>
+            <a:pPr algn="l" indent="0" marL="0">
+              <a:lnSpc>
+                <a:spcPts val="2500"/>
+              </a:lnSpc>
+              <a:buNone/>
+            </a:pPr>
+            <a:r>
+              <a:rPr lang="en-US" sz="2000" dirty="0">
+                <a:solidFill>
+                  <a:srgbClr val="AE2525"/>
+                </a:solidFill>
+                <a:latin typeface="Courier New" pitchFamily="34" charset="0"/>
+                <a:ea typeface="Courier New" pitchFamily="34" charset="-122"/>
+                <a:cs typeface="Courier New" pitchFamily="34" charset="-120"/>
+              </a:rPr>
+              <a:t>The labels on the dates overlap</a:t>
+            </a:r>
+            <a:endParaRPr lang="en-US" sz="2000" dirty="0"/>
+          </a:p>
+        </p:txBody>
+      </p:sp>
+      <p:sp>
+        <p:nvSpPr>
+          <p:cNvPr id="11" name="Text 7"/>
+          <p:cNvSpPr txBox="1"/>
+          <p:nvPr/>
+        </p:nvSpPr>
+        <p:spPr>
+          <a:xfrm>
+            <a:off x="6035040" y="3995928"/>
+            <a:ext cx="5486400" cy="1965960"/>
+          </a:xfrm>
+          <a:prstGeom prst="rect">
+            <a:avLst/>
+          </a:prstGeom>
+          <a:noFill/>
+          <a:ln/>
+        </p:spPr>
+        <p:txBody>
+          <a:bodyPr wrap="square" lIns="0" tIns="0" rIns="0" bIns="0" rtlCol="0" anchor="t"/>
+          <a:lstStyle/>
+          <a:p>
+            <a:pPr algn="l" indent="0" marL="0">
+              <a:lnSpc>
+                <a:spcPts val="2640"/>
+              </a:lnSpc>
+              <a:spcAft>
+                <a:spcPts val="1300"/>
+              </a:spcAft>
+              <a:buNone/>
+            </a:pPr>
+            <a:r>
+              <a:rPr lang="en-US" sz="2200" dirty="0">
+                <a:solidFill>
+                  <a:srgbClr val="111111"/>
+                </a:solidFill>
+                <a:latin typeface="Lato" pitchFamily="34" charset="0"/>
+                <a:ea typeface="Lato" pitchFamily="34" charset="-122"/>
+                <a:cs typeface="Lato" pitchFamily="34" charset="-120"/>
+              </a:rPr>
+              <a:t>It means: There are too many labels to fit side by side.</a:t>
+            </a:r>
+            <a:endParaRPr lang="en-US" sz="2200" dirty="0"/>
+          </a:p>
+          <a:p>
+            <a:pPr algn="l" indent="0" marL="0">
+              <a:lnSpc>
+                <a:spcPts val="2640"/>
+              </a:lnSpc>
+              <a:spcAft>
+                <a:spcPts val="1300"/>
+              </a:spcAft>
+              <a:buNone/>
+            </a:pPr>
+            <a:r>
+              <a:rPr lang="en-US" sz="2200" dirty="0">
+                <a:solidFill>
+                  <a:srgbClr val="111111"/>
+                </a:solidFill>
+                <a:latin typeface="Lato" pitchFamily="34" charset="0"/>
+                <a:ea typeface="Lato" pitchFamily="34" charset="-122"/>
+                <a:cs typeface="Lato" pitchFamily="34" charset="-120"/>
+              </a:rPr>
+              <a:t>Fix: Rotate them with plt.xticks(rotation=90) or plot fewer dates.</a:t>
+            </a:r>
+            <a:endParaRPr lang="en-US" sz="2200" dirty="0"/>
+          </a:p>
+        </p:txBody>
+      </p:sp>
       <p:sp>
         <p:nvSpPr>
           <p:cNvPr id="25" name="Slide Number Placeholder 0"/>
@@ -7135,465 +7317,6 @@
                 <a:ea typeface="Lato" pitchFamily="34" charset="-122"/>
                 <a:cs typeface="Lato" pitchFamily="34" charset="-120"/>
               </a:rPr>
-              <a:t>Two errors you may meet today</a:t>
-            </a:r>
-            <a:endParaRPr lang="en-US" sz="3800" dirty="0"/>
-          </a:p>
-        </p:txBody>
-      </p:sp>
-      <p:pic>
-        <p:nvPicPr>
-          <p:cNvPr id="3" name="Image 0" descr="Error">    </p:cNvPr>
-          <p:cNvPicPr>
-            <a:picLocks noChangeAspect="1"/>
-          </p:cNvPicPr>
-          <p:nvPr/>
-        </p:nvPicPr>
-        <p:blipFill>
-          <a:blip r:embed="rId1"/>
-          <a:stretch>
-            <a:fillRect/>
-          </a:stretch>
-        </p:blipFill>
-        <p:spPr>
-          <a:xfrm>
-            <a:off x="640080" y="1691640"/>
-            <a:ext cx="822960" cy="822960"/>
-          </a:xfrm>
-          <a:prstGeom prst="rect">
-            <a:avLst/>
-          </a:prstGeom>
-        </p:spPr>
-      </p:pic>
-      <p:sp>
-        <p:nvSpPr>
-          <p:cNvPr id="4" name="Shape 1"/>
-          <p:cNvSpPr/>
-          <p:nvPr/>
-        </p:nvSpPr>
-        <p:spPr>
-          <a:xfrm>
-            <a:off x="1645920" y="1828800"/>
-            <a:ext cx="4023360" cy="1645920"/>
-          </a:xfrm>
-          <a:prstGeom prst="roundRect">
-            <a:avLst>
-              <a:gd name="adj" fmla="val 3333"/>
-            </a:avLst>
-          </a:prstGeom>
-          <a:solidFill>
-            <a:srgbClr val="FFFFFF"/>
-          </a:solidFill>
-          <a:ln w="25400">
-            <a:solidFill>
-              <a:srgbClr val="AE2525"/>
-            </a:solidFill>
-            <a:prstDash val="solid"/>
-          </a:ln>
-        </p:spPr>
-      </p:sp>
-      <p:sp>
-        <p:nvSpPr>
-          <p:cNvPr id="5" name="Text 2"/>
-          <p:cNvSpPr txBox="1"/>
-          <p:nvPr/>
-        </p:nvSpPr>
-        <p:spPr>
-          <a:xfrm>
-            <a:off x="1783080" y="1920240"/>
-            <a:ext cx="3749040" cy="1463040"/>
-          </a:xfrm>
-          <a:prstGeom prst="rect">
-            <a:avLst/>
-          </a:prstGeom>
-          <a:noFill/>
-          <a:ln/>
-        </p:spPr>
-        <p:txBody>
-          <a:bodyPr wrap="square" lIns="0" tIns="0" rIns="0" bIns="0" rtlCol="0" anchor="ctr"/>
-          <a:lstStyle/>
-          <a:p>
-            <a:pPr algn="l" indent="0" marL="0">
-              <a:lnSpc>
-                <a:spcPts val="2500"/>
-              </a:lnSpc>
-              <a:buNone/>
-            </a:pPr>
-            <a:r>
-              <a:rPr lang="en-US" sz="2000" dirty="0">
-                <a:solidFill>
-                  <a:srgbClr val="AE2525"/>
-                </a:solidFill>
-                <a:latin typeface="Courier New" pitchFamily="34" charset="0"/>
-                <a:ea typeface="Courier New" pitchFamily="34" charset="-122"/>
-                <a:cs typeface="Courier New" pitchFamily="34" charset="-120"/>
-              </a:rPr>
-              <a:t>The chart appears empty</a:t>
-            </a:r>
-            <a:endParaRPr lang="en-US" sz="2000" dirty="0"/>
-          </a:p>
-        </p:txBody>
-      </p:sp>
-      <p:sp>
-        <p:nvSpPr>
-          <p:cNvPr id="6" name="Text 3"/>
-          <p:cNvSpPr txBox="1"/>
-          <p:nvPr/>
-        </p:nvSpPr>
-        <p:spPr>
-          <a:xfrm>
-            <a:off x="6035040" y="1664208"/>
-            <a:ext cx="5486400" cy="1965960"/>
-          </a:xfrm>
-          <a:prstGeom prst="rect">
-            <a:avLst/>
-          </a:prstGeom>
-          <a:noFill/>
-          <a:ln/>
-        </p:spPr>
-        <p:txBody>
-          <a:bodyPr wrap="square" lIns="0" tIns="0" rIns="0" bIns="0" rtlCol="0" anchor="t"/>
-          <a:lstStyle/>
-          <a:p>
-            <a:pPr algn="l" indent="0" marL="0">
-              <a:lnSpc>
-                <a:spcPts val="2640"/>
-              </a:lnSpc>
-              <a:spcAft>
-                <a:spcPts val="1300"/>
-              </a:spcAft>
-              <a:buNone/>
-            </a:pPr>
-            <a:r>
-              <a:rPr lang="en-US" sz="2200" dirty="0">
-                <a:solidFill>
-                  <a:srgbClr val="111111"/>
-                </a:solidFill>
-                <a:latin typeface="Lato" pitchFamily="34" charset="0"/>
-                <a:ea typeface="Lato" pitchFamily="34" charset="-122"/>
-                <a:cs typeface="Lato" pitchFamily="34" charset="-120"/>
-              </a:rPr>
-              <a:t>It means: plt.show() ran before the data was added, or the data was empty.</a:t>
-            </a:r>
-            <a:endParaRPr lang="en-US" sz="2200" dirty="0"/>
-          </a:p>
-          <a:p>
-            <a:pPr algn="l" indent="0" marL="0">
-              <a:lnSpc>
-                <a:spcPts val="2640"/>
-              </a:lnSpc>
-              <a:spcAft>
-                <a:spcPts val="1300"/>
-              </a:spcAft>
-              <a:buNone/>
-            </a:pPr>
-            <a:r>
-              <a:rPr lang="en-US" sz="2200" dirty="0">
-                <a:solidFill>
-                  <a:srgbClr val="111111"/>
-                </a:solidFill>
-                <a:latin typeface="Lato" pitchFamily="34" charset="0"/>
-                <a:ea typeface="Lato" pitchFamily="34" charset="-122"/>
-                <a:cs typeface="Lato" pitchFamily="34" charset="-120"/>
-              </a:rPr>
-              <a:t>Fix: Run the cell that creates the table first and print its length.</a:t>
-            </a:r>
-            <a:endParaRPr lang="en-US" sz="2200" dirty="0"/>
-          </a:p>
-        </p:txBody>
-      </p:sp>
-      <p:sp>
-        <p:nvSpPr>
-          <p:cNvPr id="7" name="Shape 4"/>
-          <p:cNvSpPr/>
-          <p:nvPr/>
-        </p:nvSpPr>
-        <p:spPr>
-          <a:xfrm>
-            <a:off x="640080" y="3813048"/>
-            <a:ext cx="10881360" cy="0"/>
-          </a:xfrm>
-          <a:prstGeom prst="line">
-            <a:avLst/>
-          </a:prstGeom>
-          <a:noFill/>
-          <a:ln w="12700">
-            <a:solidFill>
-              <a:srgbClr val="CFCFCF"/>
-            </a:solidFill>
-            <a:prstDash val="solid"/>
-          </a:ln>
-        </p:spPr>
-      </p:sp>
-      <p:pic>
-        <p:nvPicPr>
-          <p:cNvPr id="8" name="Image 1" descr="Error">    </p:cNvPr>
-          <p:cNvPicPr>
-            <a:picLocks noChangeAspect="1"/>
-          </p:cNvPicPr>
-          <p:nvPr/>
-        </p:nvPicPr>
-        <p:blipFill>
-          <a:blip r:embed="rId2"/>
-          <a:stretch>
-            <a:fillRect/>
-          </a:stretch>
-        </p:blipFill>
-        <p:spPr>
-          <a:xfrm>
-            <a:off x="640080" y="4023360"/>
-            <a:ext cx="822960" cy="822960"/>
-          </a:xfrm>
-          <a:prstGeom prst="rect">
-            <a:avLst/>
-          </a:prstGeom>
-        </p:spPr>
-      </p:pic>
-      <p:sp>
-        <p:nvSpPr>
-          <p:cNvPr id="9" name="Shape 5"/>
-          <p:cNvSpPr/>
-          <p:nvPr/>
-        </p:nvSpPr>
-        <p:spPr>
-          <a:xfrm>
-            <a:off x="1645920" y="4160520"/>
-            <a:ext cx="4023360" cy="1645920"/>
-          </a:xfrm>
-          <a:prstGeom prst="roundRect">
-            <a:avLst>
-              <a:gd name="adj" fmla="val 3333"/>
-            </a:avLst>
-          </a:prstGeom>
-          <a:solidFill>
-            <a:srgbClr val="FFFFFF"/>
-          </a:solidFill>
-          <a:ln w="25400">
-            <a:solidFill>
-              <a:srgbClr val="AE2525"/>
-            </a:solidFill>
-            <a:prstDash val="solid"/>
-          </a:ln>
-        </p:spPr>
-      </p:sp>
-      <p:sp>
-        <p:nvSpPr>
-          <p:cNvPr id="10" name="Text 6"/>
-          <p:cNvSpPr txBox="1"/>
-          <p:nvPr/>
-        </p:nvSpPr>
-        <p:spPr>
-          <a:xfrm>
-            <a:off x="1783080" y="4251960"/>
-            <a:ext cx="3749040" cy="1463040"/>
-          </a:xfrm>
-          <a:prstGeom prst="rect">
-            <a:avLst/>
-          </a:prstGeom>
-          <a:noFill/>
-          <a:ln/>
-        </p:spPr>
-        <p:txBody>
-          <a:bodyPr wrap="square" lIns="0" tIns="0" rIns="0" bIns="0" rtlCol="0" anchor="ctr"/>
-          <a:lstStyle/>
-          <a:p>
-            <a:pPr algn="l" indent="0" marL="0">
-              <a:lnSpc>
-                <a:spcPts val="2500"/>
-              </a:lnSpc>
-              <a:buNone/>
-            </a:pPr>
-            <a:r>
-              <a:rPr lang="en-US" sz="2000" dirty="0">
-                <a:solidFill>
-                  <a:srgbClr val="AE2525"/>
-                </a:solidFill>
-                <a:latin typeface="Courier New" pitchFamily="34" charset="0"/>
-                <a:ea typeface="Courier New" pitchFamily="34" charset="-122"/>
-                <a:cs typeface="Courier New" pitchFamily="34" charset="-120"/>
-              </a:rPr>
-              <a:t>The labels on the dates overlap</a:t>
-            </a:r>
-            <a:endParaRPr lang="en-US" sz="2000" dirty="0"/>
-          </a:p>
-        </p:txBody>
-      </p:sp>
-      <p:sp>
-        <p:nvSpPr>
-          <p:cNvPr id="11" name="Text 7"/>
-          <p:cNvSpPr txBox="1"/>
-          <p:nvPr/>
-        </p:nvSpPr>
-        <p:spPr>
-          <a:xfrm>
-            <a:off x="6035040" y="3995928"/>
-            <a:ext cx="5486400" cy="1965960"/>
-          </a:xfrm>
-          <a:prstGeom prst="rect">
-            <a:avLst/>
-          </a:prstGeom>
-          <a:noFill/>
-          <a:ln/>
-        </p:spPr>
-        <p:txBody>
-          <a:bodyPr wrap="square" lIns="0" tIns="0" rIns="0" bIns="0" rtlCol="0" anchor="t"/>
-          <a:lstStyle/>
-          <a:p>
-            <a:pPr algn="l" indent="0" marL="0">
-              <a:lnSpc>
-                <a:spcPts val="2640"/>
-              </a:lnSpc>
-              <a:spcAft>
-                <a:spcPts val="1300"/>
-              </a:spcAft>
-              <a:buNone/>
-            </a:pPr>
-            <a:r>
-              <a:rPr lang="en-US" sz="2200" dirty="0">
-                <a:solidFill>
-                  <a:srgbClr val="111111"/>
-                </a:solidFill>
-                <a:latin typeface="Lato" pitchFamily="34" charset="0"/>
-                <a:ea typeface="Lato" pitchFamily="34" charset="-122"/>
-                <a:cs typeface="Lato" pitchFamily="34" charset="-120"/>
-              </a:rPr>
-              <a:t>It means: There are too many labels to fit side by side.</a:t>
-            </a:r>
-            <a:endParaRPr lang="en-US" sz="2200" dirty="0"/>
-          </a:p>
-          <a:p>
-            <a:pPr algn="l" indent="0" marL="0">
-              <a:lnSpc>
-                <a:spcPts val="2640"/>
-              </a:lnSpc>
-              <a:spcAft>
-                <a:spcPts val="1300"/>
-              </a:spcAft>
-              <a:buNone/>
-            </a:pPr>
-            <a:r>
-              <a:rPr lang="en-US" sz="2200" dirty="0">
-                <a:solidFill>
-                  <a:srgbClr val="111111"/>
-                </a:solidFill>
-                <a:latin typeface="Lato" pitchFamily="34" charset="0"/>
-                <a:ea typeface="Lato" pitchFamily="34" charset="-122"/>
-                <a:cs typeface="Lato" pitchFamily="34" charset="-120"/>
-              </a:rPr>
-              <a:t>Fix: Rotate them with plt.xticks(rotation=90) or plot fewer dates.</a:t>
-            </a:r>
-            <a:endParaRPr lang="en-US" sz="2200" dirty="0"/>
-          </a:p>
-        </p:txBody>
-      </p:sp>
-      <p:sp>
-        <p:nvSpPr>
-          <p:cNvPr id="25" name="Slide Number Placeholder 0"/>
-          <p:cNvSpPr>
-            <a:spLocks noGrp="1"/>
-          </p:cNvSpPr>
-          <p:nvPr>
-            <p:ph type="sldNum" sz="quarter" idx="4294967295"/>
-          </p:nvPr>
-        </p:nvSpPr>
-        <p:spPr>
-          <a:xfrm>
-            <a:off x="10607040" y="6400800"/>
-            <a:ext cx="941832" cy="274320"/>
-          </a:xfrm>
-          <a:prstGeom prst="rect">
-            <a:avLst/>
-          </a:prstGeom>
-          <a:extLst>
-            <a:ext uri="{C572A759-6A51-4108-AA02-DFA0A04FC94B}">
-              <ma14:wrappingTextBoxFlag xmlns:ma14="http://schemas.microsoft.com/office/mac/drawingml/2011/main" val="0"/>
-            </a:ext>
-          </a:extLst>
-        </p:spPr>
-        <p:txBody>
-          <a:bodyPr/>
-          <a:lstStyle>
-            <a:lvl1pPr>
-              <a:defRPr sz="1200">
-                <a:solidFill>
-                  <a:srgbClr val="666666"/>
-                </a:solidFill>
-                <a:latin typeface="Lato"/>
-                <a:ea typeface="Lato"/>
-                <a:cs typeface="Lato"/>
-              </a:defRPr>
-            </a:lvl1pPr>
-          </a:lstStyle>
-          <a:p>
-            <a:pPr algn="r"/>
-            <a:fld id="{F7021451-1387-4CA6-816F-3879F97B5CBC}" type="slidenum">
-              <a:rPr b="0" lang="en-US"/>
-              <a:t>23</a:t>
-            </a:fld>
-            <a:endParaRPr lang="en-US"/>
-          </a:p>
-        </p:txBody>
-      </p:sp>
-    </p:spTree>
-  </p:cSld>
-  <p:clrMapOvr>
-    <a:masterClrMapping/>
-  </p:clrMapOvr>
-</p:sld>
-</file>
-
-<file path=ppt/slides/slide24.xml><?xml version="1.0" encoding="utf-8"?>
-<p:sld xmlns:a="http://schemas.openxmlformats.org/drawingml/2006/main" xmlns:r="http://schemas.openxmlformats.org/officeDocument/2006/relationships" xmlns:p="http://schemas.openxmlformats.org/presentationml/2006/main">
-  <p:cSld name="Slide 24">
-    <p:spTree>
-      <p:nvGrpSpPr>
-        <p:cNvPr id="1" name=""/>
-        <p:cNvGrpSpPr/>
-        <p:nvPr/>
-      </p:nvGrpSpPr>
-      <p:grpSpPr>
-        <a:xfrm>
-          <a:off x="0" y="0"/>
-          <a:ext cx="0" cy="0"/>
-          <a:chOff x="0" y="0"/>
-          <a:chExt cx="0" cy="0"/>
-        </a:xfrm>
-      </p:grpSpPr>
-      <p:sp>
-        <p:nvSpPr>
-          <p:cNvPr id="2" name="Text 1"/>
-          <p:cNvSpPr/>
-          <p:nvPr>
-            <p:ph idx="102" type="title" hasCustomPrompt="1"/>
-          </p:nvPr>
-        </p:nvSpPr>
-        <p:spPr>
-          <a:xfrm>
-            <a:off x="640080" y="384048"/>
-            <a:ext cx="10881360" cy="1051560"/>
-          </a:xfrm>
-          <a:prstGeom prst="rect">
-            <a:avLst/>
-          </a:prstGeom>
-          <a:noFill/>
-          <a:ln/>
-        </p:spPr>
-        <p:txBody>
-          <a:bodyPr wrap="square" lIns="0" tIns="0" rIns="0" bIns="0" rtlCol="0" anchor="t"/>
-          <a:lstStyle/>
-          <a:p>
-            <a:pPr algn="l" indent="0" marL="0">
-              <a:buNone/>
-            </a:pPr>
-            <a:r>
-              <a:rPr lang="en-US" sz="3800" b="1" dirty="0">
-                <a:solidFill>
-                  <a:srgbClr val="111111"/>
-                </a:solidFill>
-                <a:latin typeface="Lato" pitchFamily="34" charset="0"/>
-                <a:ea typeface="Lato" pitchFamily="34" charset="-122"/>
-                <a:cs typeface="Lato" pitchFamily="34" charset="-120"/>
-              </a:rPr>
               <a:t>Finish this sentence in your notebook</a:t>
             </a:r>
             <a:endParaRPr lang="en-US" sz="3800" dirty="0"/>
@@ -7753,7 +7476,7 @@
             <a:pPr algn="r"/>
             <a:fld id="{F7021451-1387-4CA6-816F-3879F97B5CBC}" type="slidenum">
               <a:rPr b="0" lang="en-US"/>
-              <a:t>24</a:t>
+              <a:t>23</a:t>
             </a:fld>
             <a:endParaRPr lang="en-US"/>
           </a:p>
@@ -10363,7 +10086,7 @@
                 <a:ea typeface="Lato" pitchFamily="34" charset="-122"/>
                 <a:cs typeface="Lato" pitchFamily="34" charset="-120"/>
               </a:rPr>
-              <a:t>Read the first part of the code. 10 lines. Say what each one does.</a:t>
+              <a:t>Predict which of the three bars will be tallest.</a:t>
             </a:r>
             <a:endParaRPr lang="en-US" sz="2400" dirty="0"/>
           </a:p>
@@ -10386,7 +10109,7 @@
                 <a:ea typeface="Lato" pitchFamily="34" charset="-122"/>
                 <a:cs typeface="Lato" pitchFamily="34" charset="-120"/>
               </a:rPr>
-              <a:t>The second part comes next.</a:t>
+              <a:t>The rest of the code is on the next slide.</a:t>
             </a:r>
             <a:endParaRPr lang="en-US" sz="2400" dirty="0"/>
           </a:p>
@@ -10815,7 +10538,7 @@
                 <a:ea typeface="Lato" pitchFamily="34" charset="-122"/>
                 <a:cs typeface="Lato" pitchFamily="34" charset="-120"/>
               </a:rPr>
-              <a:t>Predict which of the three bars will be tallest.</a:t>
+              <a:t>This is the rest of the code. Keep your guess in mind.</a:t>
             </a:r>
             <a:endParaRPr lang="en-US" sz="2400" dirty="0"/>
           </a:p>
